--- a/Kubernetes/Trainer/K8s_TrackB_Trainer_Part3.pptx
+++ b/Kubernetes/Trainer/K8s_TrackB_Trainer_Part3.pptx
@@ -4,6 +4,9 @@
   <p:sldMasterIdLst>
     <p:sldMasterId id="2147483648" r:id="rId1"/>
   </p:sldMasterIdLst>
+  <p:notesMasterIdLst>
+    <p:notesMasterId r:id="rId13"/>
+  </p:notesMasterIdLst>
   <p:sldIdLst>
     <p:sldId id="256" r:id="rId2"/>
     <p:sldId id="257" r:id="rId3"/>
@@ -17,10 +20,7 @@
     <p:sldId id="265" r:id="rId11"/>
     <p:sldId id="266" r:id="rId12"/>
   </p:sldIdLst>
-  <p:notesMasterIdLst>
-    <p:notesMasterId r:id="rId13"/>
-  </p:notesMasterIdLst>
-  <p:sldSz cx="9144000" cy="5143500"/>
+  <p:sldSz cx="9144000" cy="5143500" type="screen16x9"/>
   <p:notesSz cx="5143500" cy="9144000"/>
   <p:defaultTextStyle>
     <a:lvl1pPr marL="0" algn="l" defTabSz="914400" rtl="0" eaLnBrk="1" latinLnBrk="0" hangingPunct="1">
@@ -114,7 +114,20 @@
       </a:defRPr>
     </a:lvl9pPr>
   </p:defaultTextStyle>
+  <p:extLst>
+    <p:ext uri="{EFAFB233-063F-42B5-8137-9DF3F51BA10A}">
+      <p15:sldGuideLst xmlns:p15="http://schemas.microsoft.com/office/powerpoint/2012/main"/>
+    </p:ext>
+  </p:extLst>
 </p:presentation>
+</file>
+
+<file path=ppt/revisionInfo.xml><?xml version="1.0" encoding="utf-8"?>
+<p1510:revInfo xmlns:a="http://schemas.openxmlformats.org/drawingml/2006/main" xmlns:r="http://schemas.openxmlformats.org/officeDocument/2006/relationships" xmlns:p1510="http://schemas.microsoft.com/office/powerpoint/2015/10/main">
+  <p1510:revLst>
+    <p1510:client id="{C9EDD2A7-9F46-0CC9-C999-CBB2658C070C}" v="1" dt="2026-07-14T17:52:09.954"/>
+  </p1510:revLst>
+</p1510:revInfo>
 </file>
 
 <file path=ppt/notesMasters/notesMaster1.xml><?xml version="1.0" encoding="utf-8"?>
@@ -152,7 +165,7 @@
         <p:spPr>
           <a:xfrm>
             <a:off x="0" y="0"/>
-            <a:ext cx="2971800" cy="458788"/>
+            <a:ext cx="2228850" cy="458788"/>
           </a:xfrm>
           <a:prstGeom prst="rect">
             <a:avLst/>
@@ -166,7 +179,7 @@
             </a:lvl1pPr>
           </a:lstStyle>
           <a:p>
-            <a:endParaRPr lang="en-US"/>
+            <a:endParaRPr lang="en-GB"/>
           </a:p>
         </p:txBody>
       </p:sp>
@@ -182,8 +195,8 @@
         </p:nvSpPr>
         <p:spPr>
           <a:xfrm>
-            <a:off x="3884613" y="0"/>
-            <a:ext cx="2971800" cy="458788"/>
+            <a:off x="2913063" y="0"/>
+            <a:ext cx="2228850" cy="458788"/>
           </a:xfrm>
           <a:prstGeom prst="rect">
             <a:avLst/>
@@ -197,11 +210,10 @@
             </a:lvl1pPr>
           </a:lstStyle>
           <a:p>
-            <a:fld id="{5282F153-3F37-0F45-9E97-73ACFA13230C}" type="datetimeFigureOut">
-              <a:rPr lang="en-US"/>
-              <a:t>7/23/19</a:t>
+            <a:fld id="{0CEFF492-C24A-4A3A-A5AD-1ECBC812A3B0}" type="datetimeFigureOut">
+              <a:t>14/07/2026</a:t>
             </a:fld>
-            <a:endParaRPr lang="en-US"/>
+            <a:endParaRPr lang="en-GB"/>
           </a:p>
         </p:txBody>
       </p:sp>
@@ -217,7 +229,7 @@
         </p:nvSpPr>
         <p:spPr>
           <a:xfrm>
-            <a:off x="685800" y="1143000"/>
+            <a:off x="-171450" y="1143000"/>
             <a:ext cx="5486400" cy="3086100"/>
           </a:xfrm>
           <a:prstGeom prst="rect">
@@ -234,7 +246,7 @@
           <a:bodyPr vert="horz" lIns="91440" tIns="45720" rIns="91440" bIns="45720" rtlCol="0" anchor="ctr"/>
           <a:lstStyle/>
           <a:p>
-            <a:endParaRPr lang="en-US"/>
+            <a:endParaRPr lang="en-GB"/>
           </a:p>
         </p:txBody>
       </p:sp>
@@ -250,8 +262,8 @@
         </p:nvSpPr>
         <p:spPr>
           <a:xfrm>
-            <a:off x="685800" y="4400550"/>
-            <a:ext cx="5486400" cy="3600450"/>
+            <a:off x="514350" y="4400550"/>
+            <a:ext cx="4114800" cy="3600450"/>
           </a:xfrm>
           <a:prstGeom prst="rect">
             <a:avLst/>
@@ -263,35 +275,35 @@
           <a:p>
             <a:pPr lvl="0"/>
             <a:r>
-              <a:rPr lang="en-US"/>
+              <a:rPr lang="en-GB"/>
               <a:t>Click to edit Master text styles</a:t>
             </a:r>
           </a:p>
           <a:p>
             <a:pPr lvl="1"/>
             <a:r>
-              <a:rPr lang="en-US"/>
+              <a:rPr lang="en-GB"/>
               <a:t>Second level</a:t>
             </a:r>
           </a:p>
           <a:p>
             <a:pPr lvl="2"/>
             <a:r>
-              <a:rPr lang="en-US"/>
+              <a:rPr lang="en-GB"/>
               <a:t>Third level</a:t>
             </a:r>
           </a:p>
           <a:p>
             <a:pPr lvl="3"/>
             <a:r>
-              <a:rPr lang="en-US"/>
+              <a:rPr lang="en-GB"/>
               <a:t>Fourth level</a:t>
             </a:r>
           </a:p>
           <a:p>
             <a:pPr lvl="4"/>
             <a:r>
-              <a:rPr lang="en-US"/>
+              <a:rPr lang="en-GB"/>
               <a:t>Fifth level</a:t>
             </a:r>
           </a:p>
@@ -310,7 +322,7 @@
         <p:spPr>
           <a:xfrm>
             <a:off x="0" y="8685213"/>
-            <a:ext cx="2971800" cy="458787"/>
+            <a:ext cx="2228850" cy="458787"/>
           </a:xfrm>
           <a:prstGeom prst="rect">
             <a:avLst/>
@@ -324,7 +336,7 @@
             </a:lvl1pPr>
           </a:lstStyle>
           <a:p>
-            <a:endParaRPr lang="en-US"/>
+            <a:endParaRPr lang="en-GB"/>
           </a:p>
         </p:txBody>
       </p:sp>
@@ -340,8 +352,8 @@
         </p:nvSpPr>
         <p:spPr>
           <a:xfrm>
-            <a:off x="3884613" y="8685213"/>
-            <a:ext cx="2971800" cy="458787"/>
+            <a:off x="2913063" y="8685213"/>
+            <a:ext cx="2228850" cy="458787"/>
           </a:xfrm>
           <a:prstGeom prst="rect">
             <a:avLst/>
@@ -355,18 +367,17 @@
             </a:lvl1pPr>
           </a:lstStyle>
           <a:p>
-            <a:fld id="{CE5E9CC1-C706-0F49-92D6-E571CC5EEA8F}" type="slidenum">
-              <a:rPr lang="en-US"/>
+            <a:fld id="{316492EF-0045-4441-885D-23F0347C3FB6}" type="slidenum">
               <a:t>‹#›</a:t>
             </a:fld>
-            <a:endParaRPr lang="en-US"/>
+            <a:endParaRPr lang="en-GB"/>
           </a:p>
         </p:txBody>
       </p:sp>
     </p:spTree>
     <p:extLst>
       <p:ext uri="{BB962C8B-B14F-4D97-AF65-F5344CB8AC3E}">
-        <p14:creationId xmlns:p14="http://schemas.microsoft.com/office/powerpoint/2010/main" val="1024086991"/>
+        <p14:creationId xmlns:p14="http://schemas.microsoft.com/office/powerpoint/2010/main" val="2278174541"/>
       </p:ext>
     </p:extLst>
   </p:cSld>
@@ -515,7 +526,6 @@
               <a:t>TIMING: 10:35 (after break)
 Say: 'Deploying a simple app takes 3 YAML files — Deployment, Service, ConfigMap. A real app might have 15-20 YAML files. Now imagine maintaining that across dev, staging and production with slightly different values in each. Helm solves this — it is the apt or npm for Kubernetes.'</a:t>
             </a:r>
-            <a:endParaRPr lang="en-US" dirty="0"/>
           </a:p>
         </p:txBody>
       </p:sp>
@@ -605,7 +615,6 @@
 Ask: 'Who feels ready to manage a production Kubernetes cluster?' Let them assess themselves honestly.
 Say: 'Track B makes you production-ready. You now have the tools to deploy securely, manage access, package apps for reuse and debug when things go wrong. These are exactly the skills platform and DevOps engineers use every day.'</a:t>
             </a:r>
-            <a:endParaRPr lang="en-US" dirty="0"/>
           </a:p>
         </p:txBody>
       </p:sp>
@@ -698,7 +707,6 @@
 Part 3+4 (11 slides): Helm, Monitoring, Troubleshooting, Lab 2 + Answers, Summary, Close
 Total: 33 slides across 4 parts with speaker notes on every slide.</a:t>
             </a:r>
-            <a:endParaRPr lang="en-US" dirty="0"/>
           </a:p>
         </p:txBody>
       </p:sp>
@@ -798,7 +806,6 @@
 helm install my-nginx bitnami/nginx --set replicaCount=3
 # Overrides the default value without editing any YAML</a:t>
             </a:r>
-            <a:endParaRPr lang="en-US" dirty="0"/>
           </a:p>
         </p:txBody>
       </p:sp>
@@ -896,7 +903,6 @@
 helm install myapp-prod ./my-chart --set replicaCount=5 --set image.tag=1.25
 This is the key insight: same chart, different values = different environments. No more maintaining 3 separate sets of YAML files.</a:t>
             </a:r>
-            <a:endParaRPr lang="en-US" dirty="0"/>
           </a:p>
         </p:txBody>
       </p:sp>
@@ -985,7 +991,6 @@
               <a:t>TIMING: 11:05
 Say: 'You have deployed your app. How do you know it is healthy? How do you know if it is using too much memory? How do you find out why a Pod crashed 3 hours ago? Observability gives you the eyes inside your cluster.'</a:t>
             </a:r>
-            <a:endParaRPr lang="en-US" dirty="0"/>
           </a:p>
         </p:txBody>
       </p:sp>
@@ -1083,7 +1088,6 @@
 helm repo add prometheus-community https://prometheus-community.github.io/helm-charts
 helm install monitoring prometheus-community/kube-prometheus-stack</a:t>
             </a:r>
-            <a:endParaRPr lang="en-US" dirty="0"/>
           </a:p>
         </p:txBody>
       </p:sp>
@@ -1172,7 +1176,6 @@
               <a:t>TIMING: 11:20
 Say: 'Before the lab, we cover the systematic approach to debugging. Most Kubernetes problems fall into a small number of categories and each has a standard diagnostic path. Once you know the path, debugging becomes fast and methodical rather than guesswork.'</a:t>
             </a:r>
-            <a:endParaRPr lang="en-US" dirty="0"/>
           </a:p>
         </p:txBody>
       </p:sp>
@@ -1268,7 +1271,6 @@
 Walk through every step. Let students call out what they see before you explain.
 'The Events section in kubectl describe is the most underused debugging tool. It tells you: what happened, when it happened, and how many times. Start here before anything else.'</a:t>
             </a:r>
-            <a:endParaRPr lang="en-US" dirty="0"/>
           </a:p>
         </p:txBody>
       </p:sp>
@@ -1357,7 +1359,6 @@
               <a:t>Keep this open during Lab 2. Track B students will hit RBAC errors and Helm issues most often.
 Helm debug tip: helm install --dry-run --debug renders all templates without applying. Shows exactly what YAML Helm would send to the cluster. Students can catch mistakes before they happen.</a:t>
             </a:r>
-            <a:endParaRPr lang="en-US" dirty="0"/>
           </a:p>
         </p:txBody>
       </p:sp>
@@ -1469,7 +1470,6 @@
 2. kubectl auth can-i needs system:serviceaccount:&lt;namespace&gt;:&lt;name&gt; format
 3. helm upgrade fails if --set replicaCount typo</a:t>
             </a:r>
-            <a:endParaRPr lang="en-US" dirty="0"/>
           </a:p>
         </p:txBody>
       </p:sp>
@@ -1542,6 +1542,11 @@
 <file path=ppt/slideMasters/slideMaster1.xml><?xml version="1.0" encoding="utf-8"?>
 <p:sldMaster xmlns:a="http://schemas.openxmlformats.org/drawingml/2006/main" xmlns:r="http://schemas.openxmlformats.org/officeDocument/2006/relationships" xmlns:p="http://schemas.openxmlformats.org/presentationml/2006/main">
   <p:cSld>
+    <p:bg>
+      <p:bgRef idx="1001">
+        <a:schemeClr val="bg1"/>
+      </p:bgRef>
+    </p:bg>
     <p:spTree>
       <p:nvGrpSpPr>
         <p:cNvPr id="1" name=""/>
@@ -1824,6 +1829,7 @@
         <a:solidFill>
           <a:srgbClr val="0F172A"/>
         </a:solidFill>
+        <a:effectLst/>
       </p:bgPr>
     </p:bg>
     <p:spTree>
@@ -1867,35 +1873,6 @@
       </p:sp>
       <p:sp>
         <p:nvSpPr>
-          <p:cNvPr id="3" name="Shape 1"/>
-          <p:cNvSpPr/>
-          <p:nvPr/>
-        </p:nvSpPr>
-        <p:spPr>
-          <a:xfrm>
-            <a:off x="5943600" y="-914400"/>
-            <a:ext cx="4572000" cy="4572000"/>
-          </a:xfrm>
-          <a:prstGeom prst="ellipse">
-            <a:avLst/>
-          </a:prstGeom>
-          <a:solidFill>
-            <a:srgbClr val="326CE5">
-              <a:alpha val="10000"/>
-            </a:srgbClr>
-          </a:solidFill>
-          <a:ln w="12700">
-            <a:solidFill>
-              <a:srgbClr val="326CE5">
-                <a:alpha val="20000"/>
-              </a:srgbClr>
-            </a:solidFill>
-            <a:prstDash val="solid"/>
-          </a:ln>
-        </p:spPr>
-      </p:sp>
-      <p:sp>
-        <p:nvSpPr>
           <p:cNvPr id="4" name="Text 2"/>
           <p:cNvSpPr/>
           <p:nvPr/>
@@ -1915,11 +1892,11 @@
           <a:bodyPr wrap="square" lIns="0" tIns="0" rIns="0" bIns="0" rtlCol="0" anchor="ctr"/>
           <a:lstStyle/>
           <a:p>
-            <a:pPr indent="0" marL="0">
-              <a:buNone/>
-            </a:pPr>
-            <a:r>
-              <a:rPr lang="en-US" sz="1200" b="1" spc="400" kern="0" dirty="0">
+            <a:pPr marL="0" indent="0">
+              <a:buNone/>
+            </a:pPr>
+            <a:r>
+              <a:rPr lang="en-US" sz="1200" b="1" kern="0" spc="400" dirty="0">
                 <a:solidFill>
                   <a:srgbClr val="326CE5"/>
                 </a:solidFill>
@@ -1954,7 +1931,7 @@
           <a:bodyPr wrap="square" lIns="0" tIns="0" rIns="0" bIns="0" rtlCol="0" anchor="ctr"/>
           <a:lstStyle/>
           <a:p>
-            <a:pPr indent="0" marL="0">
+            <a:pPr marL="0" indent="0">
               <a:buNone/>
             </a:pPr>
             <a:r>
@@ -1993,7 +1970,7 @@
           <a:bodyPr wrap="square" lIns="0" tIns="0" rIns="0" bIns="0" rtlCol="0" anchor="ctr"/>
           <a:lstStyle/>
           <a:p>
-            <a:pPr indent="0" marL="0">
+            <a:pPr marL="0" indent="0">
               <a:buNone/>
             </a:pPr>
             <a:r>
@@ -2027,6 +2004,7 @@
         <a:solidFill>
           <a:srgbClr val="FFFFFF"/>
         </a:solidFill>
+        <a:effectLst/>
       </p:bgPr>
     </p:bg>
     <p:spTree>
@@ -2089,7 +2067,7 @@
           <a:bodyPr wrap="square" lIns="0" tIns="0" rIns="0" bIns="0" rtlCol="0" anchor="ctr"/>
           <a:lstStyle/>
           <a:p>
-            <a:pPr indent="0" marL="0">
+            <a:pPr marL="0" indent="0">
               <a:buNone/>
             </a:pPr>
             <a:r>
@@ -2155,7 +2133,7 @@
           <a:bodyPr wrap="square" lIns="0" tIns="0" rIns="0" bIns="0" rtlCol="0" anchor="ctr"/>
           <a:lstStyle/>
           <a:p>
-            <a:pPr algn="ctr" indent="0" marL="0">
+            <a:pPr marL="0" indent="0" algn="ctr">
               <a:buNone/>
             </a:pPr>
             <a:r>
@@ -2199,7 +2177,7 @@
             <a:prstDash val="solid"/>
           </a:ln>
           <a:effectLst>
-            <a:outerShdw sx="100000" sy="100000" kx="0" ky="0" algn="bl" rotWithShape="0" blurRad="76200" dist="38100" dir="2700000">
+            <a:outerShdw blurRad="76200" dist="38100" dir="2700000" algn="bl" rotWithShape="0">
               <a:srgbClr val="000000">
                 <a:alpha val="10000"/>
               </a:srgbClr>
@@ -2255,7 +2233,7 @@
           <a:bodyPr wrap="square" lIns="0" tIns="0" rIns="0" bIns="0" rtlCol="0" anchor="ctr"/>
           <a:lstStyle/>
           <a:p>
-            <a:pPr algn="ctr" indent="0" marL="0">
+            <a:pPr marL="0" indent="0" algn="ctr">
               <a:buNone/>
             </a:pPr>
             <a:r>
@@ -2294,7 +2272,7 @@
           <a:bodyPr wrap="square" lIns="0" tIns="0" rIns="0" bIns="0" rtlCol="0" anchor="ctr"/>
           <a:lstStyle/>
           <a:p>
-            <a:pPr indent="0" marL="0">
+            <a:pPr marL="0" indent="0">
               <a:buNone/>
             </a:pPr>
             <a:r>
@@ -2333,7 +2311,7 @@
           <a:bodyPr wrap="square" lIns="0" tIns="0" rIns="0" bIns="0" rtlCol="0" anchor="ctr"/>
           <a:lstStyle/>
           <a:p>
-            <a:pPr indent="0" marL="0">
+            <a:pPr marL="0" indent="0">
               <a:buNone/>
             </a:pPr>
             <a:r>
@@ -2372,7 +2350,7 @@
           <a:bodyPr wrap="square" lIns="0" tIns="0" rIns="0" bIns="0" rtlCol="0" anchor="ctr"/>
           <a:lstStyle/>
           <a:p>
-            <a:pPr indent="0" marL="0">
+            <a:pPr marL="0" indent="0">
               <a:buNone/>
             </a:pPr>
             <a:r>
@@ -2411,7 +2389,7 @@
           <a:bodyPr wrap="square" lIns="0" tIns="0" rIns="0" bIns="0" rtlCol="0" anchor="ctr"/>
           <a:lstStyle/>
           <a:p>
-            <a:pPr indent="0" marL="0">
+            <a:pPr marL="0" indent="0">
               <a:buNone/>
             </a:pPr>
             <a:r>
@@ -2455,7 +2433,7 @@
             <a:prstDash val="solid"/>
           </a:ln>
           <a:effectLst>
-            <a:outerShdw sx="100000" sy="100000" kx="0" ky="0" algn="bl" rotWithShape="0" blurRad="76200" dist="38100" dir="2700000">
+            <a:outerShdw blurRad="76200" dist="38100" dir="2700000" algn="bl" rotWithShape="0">
               <a:srgbClr val="000000">
                 <a:alpha val="10000"/>
               </a:srgbClr>
@@ -2511,7 +2489,7 @@
           <a:bodyPr wrap="square" lIns="0" tIns="0" rIns="0" bIns="0" rtlCol="0" anchor="ctr"/>
           <a:lstStyle/>
           <a:p>
-            <a:pPr algn="ctr" indent="0" marL="0">
+            <a:pPr marL="0" indent="0" algn="ctr">
               <a:buNone/>
             </a:pPr>
             <a:r>
@@ -2550,7 +2528,7 @@
           <a:bodyPr wrap="square" lIns="0" tIns="0" rIns="0" bIns="0" rtlCol="0" anchor="ctr"/>
           <a:lstStyle/>
           <a:p>
-            <a:pPr indent="0" marL="0">
+            <a:pPr marL="0" indent="0">
               <a:buNone/>
             </a:pPr>
             <a:r>
@@ -2589,7 +2567,7 @@
           <a:bodyPr wrap="square" lIns="0" tIns="0" rIns="0" bIns="0" rtlCol="0" anchor="ctr"/>
           <a:lstStyle/>
           <a:p>
-            <a:pPr indent="0" marL="0">
+            <a:pPr marL="0" indent="0">
               <a:buNone/>
             </a:pPr>
             <a:r>
@@ -2628,7 +2606,7 @@
           <a:bodyPr wrap="square" lIns="0" tIns="0" rIns="0" bIns="0" rtlCol="0" anchor="ctr"/>
           <a:lstStyle/>
           <a:p>
-            <a:pPr indent="0" marL="0">
+            <a:pPr marL="0" indent="0">
               <a:buNone/>
             </a:pPr>
             <a:r>
@@ -2667,7 +2645,7 @@
           <a:bodyPr wrap="square" lIns="0" tIns="0" rIns="0" bIns="0" rtlCol="0" anchor="ctr"/>
           <a:lstStyle/>
           <a:p>
-            <a:pPr indent="0" marL="0">
+            <a:pPr marL="0" indent="0">
               <a:buNone/>
             </a:pPr>
             <a:r>
@@ -2711,7 +2689,7 @@
             <a:prstDash val="solid"/>
           </a:ln>
           <a:effectLst>
-            <a:outerShdw sx="100000" sy="100000" kx="0" ky="0" algn="bl" rotWithShape="0" blurRad="76200" dist="38100" dir="2700000">
+            <a:outerShdw blurRad="76200" dist="38100" dir="2700000" algn="bl" rotWithShape="0">
               <a:srgbClr val="000000">
                 <a:alpha val="10000"/>
               </a:srgbClr>
@@ -2767,7 +2745,7 @@
           <a:bodyPr wrap="square" lIns="0" tIns="0" rIns="0" bIns="0" rtlCol="0" anchor="ctr"/>
           <a:lstStyle/>
           <a:p>
-            <a:pPr algn="ctr" indent="0" marL="0">
+            <a:pPr marL="0" indent="0" algn="ctr">
               <a:buNone/>
             </a:pPr>
             <a:r>
@@ -2806,7 +2784,7 @@
           <a:bodyPr wrap="square" lIns="0" tIns="0" rIns="0" bIns="0" rtlCol="0" anchor="ctr"/>
           <a:lstStyle/>
           <a:p>
-            <a:pPr indent="0" marL="0">
+            <a:pPr marL="0" indent="0">
               <a:buNone/>
             </a:pPr>
             <a:r>
@@ -2845,7 +2823,7 @@
           <a:bodyPr wrap="square" lIns="0" tIns="0" rIns="0" bIns="0" rtlCol="0" anchor="ctr"/>
           <a:lstStyle/>
           <a:p>
-            <a:pPr indent="0" marL="0">
+            <a:pPr marL="0" indent="0">
               <a:buNone/>
             </a:pPr>
             <a:r>
@@ -2884,7 +2862,7 @@
           <a:bodyPr wrap="square" lIns="0" tIns="0" rIns="0" bIns="0" rtlCol="0" anchor="ctr"/>
           <a:lstStyle/>
           <a:p>
-            <a:pPr indent="0" marL="0">
+            <a:pPr marL="0" indent="0">
               <a:buNone/>
             </a:pPr>
             <a:r>
@@ -2923,7 +2901,7 @@
           <a:bodyPr wrap="square" lIns="0" tIns="0" rIns="0" bIns="0" rtlCol="0" anchor="ctr"/>
           <a:lstStyle/>
           <a:p>
-            <a:pPr indent="0" marL="0">
+            <a:pPr marL="0" indent="0">
               <a:buNone/>
             </a:pPr>
             <a:r>
@@ -2967,7 +2945,7 @@
             <a:prstDash val="solid"/>
           </a:ln>
           <a:effectLst>
-            <a:outerShdw sx="100000" sy="100000" kx="0" ky="0" algn="bl" rotWithShape="0" blurRad="76200" dist="38100" dir="2700000">
+            <a:outerShdw blurRad="76200" dist="38100" dir="2700000" algn="bl" rotWithShape="0">
               <a:srgbClr val="000000">
                 <a:alpha val="10000"/>
               </a:srgbClr>
@@ -3023,7 +3001,7 @@
           <a:bodyPr wrap="square" lIns="0" tIns="0" rIns="0" bIns="0" rtlCol="0" anchor="ctr"/>
           <a:lstStyle/>
           <a:p>
-            <a:pPr algn="ctr" indent="0" marL="0">
+            <a:pPr marL="0" indent="0" algn="ctr">
               <a:buNone/>
             </a:pPr>
             <a:r>
@@ -3062,7 +3040,7 @@
           <a:bodyPr wrap="square" lIns="0" tIns="0" rIns="0" bIns="0" rtlCol="0" anchor="ctr"/>
           <a:lstStyle/>
           <a:p>
-            <a:pPr indent="0" marL="0">
+            <a:pPr marL="0" indent="0">
               <a:buNone/>
             </a:pPr>
             <a:r>
@@ -3101,7 +3079,7 @@
           <a:bodyPr wrap="square" lIns="0" tIns="0" rIns="0" bIns="0" rtlCol="0" anchor="ctr"/>
           <a:lstStyle/>
           <a:p>
-            <a:pPr indent="0" marL="0">
+            <a:pPr marL="0" indent="0">
               <a:buNone/>
             </a:pPr>
             <a:r>
@@ -3140,7 +3118,7 @@
           <a:bodyPr wrap="square" lIns="0" tIns="0" rIns="0" bIns="0" rtlCol="0" anchor="ctr"/>
           <a:lstStyle/>
           <a:p>
-            <a:pPr indent="0" marL="0">
+            <a:pPr marL="0" indent="0">
               <a:buNone/>
             </a:pPr>
             <a:r>
@@ -3179,7 +3157,7 @@
           <a:bodyPr wrap="square" lIns="0" tIns="0" rIns="0" bIns="0" rtlCol="0" anchor="ctr"/>
           <a:lstStyle/>
           <a:p>
-            <a:pPr indent="0" marL="0">
+            <a:pPr marL="0" indent="0">
               <a:buNone/>
             </a:pPr>
             <a:r>
@@ -3223,7 +3201,7 @@
             <a:prstDash val="solid"/>
           </a:ln>
           <a:effectLst>
-            <a:outerShdw sx="100000" sy="100000" kx="0" ky="0" algn="bl" rotWithShape="0" blurRad="76200" dist="38100" dir="2700000">
+            <a:outerShdw blurRad="76200" dist="38100" dir="2700000" algn="bl" rotWithShape="0">
               <a:srgbClr val="000000">
                 <a:alpha val="10000"/>
               </a:srgbClr>
@@ -3279,7 +3257,7 @@
           <a:bodyPr wrap="square" lIns="0" tIns="0" rIns="0" bIns="0" rtlCol="0" anchor="ctr"/>
           <a:lstStyle/>
           <a:p>
-            <a:pPr algn="ctr" indent="0" marL="0">
+            <a:pPr marL="0" indent="0" algn="ctr">
               <a:buNone/>
             </a:pPr>
             <a:r>
@@ -3318,7 +3296,7 @@
           <a:bodyPr wrap="square" lIns="0" tIns="0" rIns="0" bIns="0" rtlCol="0" anchor="ctr"/>
           <a:lstStyle/>
           <a:p>
-            <a:pPr indent="0" marL="0">
+            <a:pPr marL="0" indent="0">
               <a:buNone/>
             </a:pPr>
             <a:r>
@@ -3357,7 +3335,7 @@
           <a:bodyPr wrap="square" lIns="0" tIns="0" rIns="0" bIns="0" rtlCol="0" anchor="ctr"/>
           <a:lstStyle/>
           <a:p>
-            <a:pPr indent="0" marL="0">
+            <a:pPr marL="0" indent="0">
               <a:buNone/>
             </a:pPr>
             <a:r>
@@ -3396,7 +3374,7 @@
           <a:bodyPr wrap="square" lIns="0" tIns="0" rIns="0" bIns="0" rtlCol="0" anchor="ctr"/>
           <a:lstStyle/>
           <a:p>
-            <a:pPr indent="0" marL="0">
+            <a:pPr marL="0" indent="0">
               <a:buNone/>
             </a:pPr>
             <a:r>
@@ -3435,7 +3413,7 @@
           <a:bodyPr wrap="square" lIns="0" tIns="0" rIns="0" bIns="0" rtlCol="0" anchor="ctr"/>
           <a:lstStyle/>
           <a:p>
-            <a:pPr indent="0" marL="0">
+            <a:pPr marL="0" indent="0">
               <a:buNone/>
             </a:pPr>
             <a:r>
@@ -3479,7 +3457,7 @@
             <a:prstDash val="solid"/>
           </a:ln>
           <a:effectLst>
-            <a:outerShdw sx="100000" sy="100000" kx="0" ky="0" algn="bl" rotWithShape="0" blurRad="76200" dist="38100" dir="2700000">
+            <a:outerShdw blurRad="76200" dist="38100" dir="2700000" algn="bl" rotWithShape="0">
               <a:srgbClr val="000000">
                 <a:alpha val="10000"/>
               </a:srgbClr>
@@ -3535,7 +3513,7 @@
           <a:bodyPr wrap="square" lIns="0" tIns="0" rIns="0" bIns="0" rtlCol="0" anchor="ctr"/>
           <a:lstStyle/>
           <a:p>
-            <a:pPr algn="ctr" indent="0" marL="0">
+            <a:pPr marL="0" indent="0" algn="ctr">
               <a:buNone/>
             </a:pPr>
             <a:r>
@@ -3574,7 +3552,7 @@
           <a:bodyPr wrap="square" lIns="0" tIns="0" rIns="0" bIns="0" rtlCol="0" anchor="ctr"/>
           <a:lstStyle/>
           <a:p>
-            <a:pPr indent="0" marL="0">
+            <a:pPr marL="0" indent="0">
               <a:buNone/>
             </a:pPr>
             <a:r>
@@ -3613,7 +3591,7 @@
           <a:bodyPr wrap="square" lIns="0" tIns="0" rIns="0" bIns="0" rtlCol="0" anchor="ctr"/>
           <a:lstStyle/>
           <a:p>
-            <a:pPr indent="0" marL="0">
+            <a:pPr marL="0" indent="0">
               <a:buNone/>
             </a:pPr>
             <a:r>
@@ -3652,7 +3630,7 @@
           <a:bodyPr wrap="square" lIns="0" tIns="0" rIns="0" bIns="0" rtlCol="0" anchor="ctr"/>
           <a:lstStyle/>
           <a:p>
-            <a:pPr indent="0" marL="0">
+            <a:pPr marL="0" indent="0">
               <a:buNone/>
             </a:pPr>
             <a:r>
@@ -3691,7 +3669,7 @@
           <a:bodyPr wrap="square" lIns="0" tIns="0" rIns="0" bIns="0" rtlCol="0" anchor="ctr"/>
           <a:lstStyle/>
           <a:p>
-            <a:pPr indent="0" marL="0">
+            <a:pPr marL="0" indent="0">
               <a:buNone/>
             </a:pPr>
             <a:r>
@@ -3735,7 +3713,7 @@
             <a:prstDash val="solid"/>
           </a:ln>
           <a:effectLst>
-            <a:outerShdw sx="100000" sy="100000" kx="0" ky="0" algn="bl" rotWithShape="0" blurRad="76200" dist="38100" dir="2700000">
+            <a:outerShdw blurRad="76200" dist="38100" dir="2700000" algn="bl" rotWithShape="0">
               <a:srgbClr val="000000">
                 <a:alpha val="10000"/>
               </a:srgbClr>
@@ -3791,7 +3769,7 @@
           <a:bodyPr wrap="square" lIns="0" tIns="0" rIns="0" bIns="0" rtlCol="0" anchor="ctr"/>
           <a:lstStyle/>
           <a:p>
-            <a:pPr algn="ctr" indent="0" marL="0">
+            <a:pPr marL="0" indent="0" algn="ctr">
               <a:buNone/>
             </a:pPr>
             <a:r>
@@ -3830,7 +3808,7 @@
           <a:bodyPr wrap="square" lIns="0" tIns="0" rIns="0" bIns="0" rtlCol="0" anchor="ctr"/>
           <a:lstStyle/>
           <a:p>
-            <a:pPr indent="0" marL="0">
+            <a:pPr marL="0" indent="0">
               <a:buNone/>
             </a:pPr>
             <a:r>
@@ -3869,7 +3847,7 @@
           <a:bodyPr wrap="square" lIns="0" tIns="0" rIns="0" bIns="0" rtlCol="0" anchor="ctr"/>
           <a:lstStyle/>
           <a:p>
-            <a:pPr indent="0" marL="0">
+            <a:pPr marL="0" indent="0">
               <a:buNone/>
             </a:pPr>
             <a:r>
@@ -3908,7 +3886,7 @@
           <a:bodyPr wrap="square" lIns="0" tIns="0" rIns="0" bIns="0" rtlCol="0" anchor="ctr"/>
           <a:lstStyle/>
           <a:p>
-            <a:pPr indent="0" marL="0">
+            <a:pPr marL="0" indent="0">
               <a:buNone/>
             </a:pPr>
             <a:r>
@@ -3947,7 +3925,7 @@
           <a:bodyPr wrap="square" lIns="0" tIns="0" rIns="0" bIns="0" rtlCol="0" anchor="ctr"/>
           <a:lstStyle/>
           <a:p>
-            <a:pPr indent="0" marL="0">
+            <a:pPr marL="0" indent="0">
               <a:buNone/>
             </a:pPr>
             <a:r>
@@ -3991,7 +3969,7 @@
             <a:prstDash val="solid"/>
           </a:ln>
           <a:effectLst>
-            <a:outerShdw sx="100000" sy="100000" kx="0" ky="0" algn="bl" rotWithShape="0" blurRad="76200" dist="38100" dir="2700000">
+            <a:outerShdw blurRad="76200" dist="38100" dir="2700000" algn="bl" rotWithShape="0">
               <a:srgbClr val="000000">
                 <a:alpha val="10000"/>
               </a:srgbClr>
@@ -4047,7 +4025,7 @@
           <a:bodyPr wrap="square" lIns="0" tIns="0" rIns="0" bIns="0" rtlCol="0" anchor="ctr"/>
           <a:lstStyle/>
           <a:p>
-            <a:pPr algn="ctr" indent="0" marL="0">
+            <a:pPr marL="0" indent="0" algn="ctr">
               <a:buNone/>
             </a:pPr>
             <a:r>
@@ -4086,7 +4064,7 @@
           <a:bodyPr wrap="square" lIns="0" tIns="0" rIns="0" bIns="0" rtlCol="0" anchor="ctr"/>
           <a:lstStyle/>
           <a:p>
-            <a:pPr indent="0" marL="0">
+            <a:pPr marL="0" indent="0">
               <a:buNone/>
             </a:pPr>
             <a:r>
@@ -4125,7 +4103,7 @@
           <a:bodyPr wrap="square" lIns="0" tIns="0" rIns="0" bIns="0" rtlCol="0" anchor="ctr"/>
           <a:lstStyle/>
           <a:p>
-            <a:pPr indent="0" marL="0">
+            <a:pPr marL="0" indent="0">
               <a:buNone/>
             </a:pPr>
             <a:r>
@@ -4164,7 +4142,7 @@
           <a:bodyPr wrap="square" lIns="0" tIns="0" rIns="0" bIns="0" rtlCol="0" anchor="ctr"/>
           <a:lstStyle/>
           <a:p>
-            <a:pPr indent="0" marL="0">
+            <a:pPr marL="0" indent="0">
               <a:buNone/>
             </a:pPr>
             <a:r>
@@ -4203,7 +4181,7 @@
           <a:bodyPr wrap="square" lIns="0" tIns="0" rIns="0" bIns="0" rtlCol="0" anchor="ctr"/>
           <a:lstStyle/>
           <a:p>
-            <a:pPr indent="0" marL="0">
+            <a:pPr marL="0" indent="0">
               <a:buNone/>
             </a:pPr>
             <a:r>
@@ -4267,7 +4245,7 @@
           <a:bodyPr wrap="square" lIns="0" tIns="0" rIns="0" bIns="0" rtlCol="0" anchor="ctr"/>
           <a:lstStyle/>
           <a:p>
-            <a:pPr algn="ctr" indent="0" marL="0">
+            <a:pPr marL="0" indent="0" algn="ctr">
               <a:buNone/>
             </a:pPr>
             <a:r>
@@ -4301,6 +4279,7 @@
         <a:solidFill>
           <a:srgbClr val="7C2D12"/>
         </a:solidFill>
+        <a:effectLst/>
       </p:bgPr>
     </p:bg>
     <p:spTree>
@@ -4392,7 +4371,7 @@
           <a:bodyPr wrap="square" lIns="0" tIns="0" rIns="0" bIns="0" rtlCol="0" anchor="ctr"/>
           <a:lstStyle/>
           <a:p>
-            <a:pPr indent="0" marL="0">
+            <a:pPr marL="0" indent="0">
               <a:buNone/>
             </a:pPr>
             <a:r>
@@ -4456,7 +4435,7 @@
           <a:bodyPr wrap="square" lIns="0" tIns="0" rIns="0" bIns="0" rtlCol="0" anchor="ctr"/>
           <a:lstStyle/>
           <a:p>
-            <a:pPr indent="0" marL="0">
+            <a:pPr marL="0" indent="0">
               <a:buNone/>
             </a:pPr>
             <a:r>
@@ -4495,7 +4474,7 @@
           <a:bodyPr wrap="square" lIns="0" tIns="0" rIns="0" bIns="0" rtlCol="0" anchor="ctr"/>
           <a:lstStyle/>
           <a:p>
-            <a:pPr indent="0" marL="0">
+            <a:pPr marL="0" indent="0">
               <a:buNone/>
             </a:pPr>
             <a:r>
@@ -4509,9 +4488,6 @@
               </a:rPr>
               <a:t>Post-training:  </a:t>
             </a:r>
-            <a:pPr indent="0" marL="0">
-              <a:buNone/>
-            </a:pPr>
             <a:r>
               <a:rPr lang="en-US" sz="1100" dirty="0">
                 <a:solidFill>
@@ -4553,7 +4529,7 @@
             <a:prstDash val="solid"/>
           </a:ln>
           <a:effectLst>
-            <a:outerShdw sx="100000" sy="100000" kx="0" ky="0" algn="bl" rotWithShape="0" blurRad="76200" dist="38100" dir="2700000">
+            <a:outerShdw blurRad="76200" dist="38100" dir="2700000" algn="bl" rotWithShape="0">
               <a:srgbClr val="000000">
                 <a:alpha val="10000"/>
               </a:srgbClr>
@@ -4582,7 +4558,7 @@
           <a:bodyPr wrap="square" lIns="0" tIns="0" rIns="0" bIns="0" rtlCol="0" anchor="ctr"/>
           <a:lstStyle/>
           <a:p>
-            <a:pPr algn="ctr" indent="0" marL="0">
+            <a:pPr marL="0" indent="0" algn="ctr">
               <a:buNone/>
             </a:pPr>
             <a:r>
@@ -4646,7 +4622,7 @@
           <a:bodyPr wrap="square" lIns="0" tIns="0" rIns="0" bIns="0" rtlCol="0" anchor="ctr"/>
           <a:lstStyle/>
           <a:p>
-            <a:pPr algn="ctr" indent="0" marL="0">
+            <a:pPr marL="0" indent="0" algn="ctr">
               <a:buNone/>
             </a:pPr>
             <a:r>
@@ -4680,6 +4656,7 @@
         <a:solidFill>
           <a:srgbClr val="FFFFFF"/>
         </a:solidFill>
+        <a:effectLst/>
       </p:bgPr>
     </p:bg>
     <p:spTree>
@@ -4742,7 +4719,7 @@
           <a:bodyPr wrap="square" lIns="0" tIns="0" rIns="0" bIns="0" rtlCol="0" anchor="ctr"/>
           <a:lstStyle/>
           <a:p>
-            <a:pPr indent="0" marL="0">
+            <a:pPr marL="0" indent="0">
               <a:buNone/>
             </a:pPr>
             <a:r>
@@ -4808,7 +4785,7 @@
           <a:bodyPr wrap="square" lIns="0" tIns="0" rIns="0" bIns="0" rtlCol="0" anchor="ctr"/>
           <a:lstStyle/>
           <a:p>
-            <a:pPr algn="ctr" indent="0" marL="0">
+            <a:pPr marL="0" indent="0" algn="ctr">
               <a:buNone/>
             </a:pPr>
             <a:r>
@@ -4852,7 +4829,7 @@
             <a:prstDash val="solid"/>
           </a:ln>
           <a:effectLst>
-            <a:outerShdw sx="100000" sy="100000" kx="0" ky="0" algn="bl" rotWithShape="0" blurRad="76200" dist="38100" dir="2700000">
+            <a:outerShdw blurRad="76200" dist="38100" dir="2700000" algn="bl" rotWithShape="0">
               <a:srgbClr val="000000">
                 <a:alpha val="10000"/>
               </a:srgbClr>
@@ -4881,7 +4858,7 @@
           <a:bodyPr wrap="square" lIns="0" tIns="0" rIns="0" bIns="0" rtlCol="0" anchor="ctr"/>
           <a:lstStyle/>
           <a:p>
-            <a:pPr indent="0" marL="0">
+            <a:pPr marL="0" indent="0">
               <a:buNone/>
             </a:pPr>
             <a:r>
@@ -4925,7 +4902,7 @@
             <a:prstDash val="solid"/>
           </a:ln>
           <a:effectLst>
-            <a:outerShdw sx="100000" sy="100000" kx="0" ky="0" algn="bl" rotWithShape="0" blurRad="76200" dist="38100" dir="2700000">
+            <a:outerShdw blurRad="76200" dist="38100" dir="2700000" algn="bl" rotWithShape="0">
               <a:srgbClr val="000000">
                 <a:alpha val="10000"/>
               </a:srgbClr>
@@ -4954,7 +4931,7 @@
           <a:bodyPr wrap="square" lIns="0" tIns="0" rIns="0" bIns="0" rtlCol="0" anchor="ctr"/>
           <a:lstStyle/>
           <a:p>
-            <a:pPr indent="0" marL="0">
+            <a:pPr marL="0" indent="0">
               <a:buNone/>
             </a:pPr>
             <a:r>
@@ -4993,7 +4970,7 @@
           <a:bodyPr wrap="square" lIns="0" tIns="0" rIns="0" bIns="0" rtlCol="0" anchor="ctr"/>
           <a:lstStyle/>
           <a:p>
-            <a:pPr indent="0" marL="0">
+            <a:pPr marL="0" indent="0">
               <a:buNone/>
             </a:pPr>
             <a:r>
@@ -5037,7 +5014,7 @@
             <a:prstDash val="solid"/>
           </a:ln>
           <a:effectLst>
-            <a:outerShdw sx="100000" sy="100000" kx="0" ky="0" algn="bl" rotWithShape="0" blurRad="76200" dist="38100" dir="2700000">
+            <a:outerShdw blurRad="76200" dist="38100" dir="2700000" algn="bl" rotWithShape="0">
               <a:srgbClr val="000000">
                 <a:alpha val="10000"/>
               </a:srgbClr>
@@ -5066,7 +5043,7 @@
           <a:bodyPr wrap="square" lIns="0" tIns="0" rIns="0" bIns="0" rtlCol="0" anchor="ctr"/>
           <a:lstStyle/>
           <a:p>
-            <a:pPr indent="0" marL="0">
+            <a:pPr marL="0" indent="0">
               <a:buNone/>
             </a:pPr>
             <a:r>
@@ -5105,7 +5082,7 @@
           <a:bodyPr wrap="square" lIns="0" tIns="0" rIns="0" bIns="0" rtlCol="0" anchor="ctr"/>
           <a:lstStyle/>
           <a:p>
-            <a:pPr indent="0" marL="0">
+            <a:pPr marL="0" indent="0">
               <a:buNone/>
             </a:pPr>
             <a:r>
@@ -5149,7 +5126,7 @@
             <a:prstDash val="solid"/>
           </a:ln>
           <a:effectLst>
-            <a:outerShdw sx="100000" sy="100000" kx="0" ky="0" algn="bl" rotWithShape="0" blurRad="76200" dist="38100" dir="2700000">
+            <a:outerShdw blurRad="76200" dist="38100" dir="2700000" algn="bl" rotWithShape="0">
               <a:srgbClr val="000000">
                 <a:alpha val="10000"/>
               </a:srgbClr>
@@ -5178,7 +5155,7 @@
           <a:bodyPr wrap="square" lIns="0" tIns="0" rIns="0" bIns="0" rtlCol="0" anchor="ctr"/>
           <a:lstStyle/>
           <a:p>
-            <a:pPr indent="0" marL="0">
+            <a:pPr marL="0" indent="0">
               <a:buNone/>
             </a:pPr>
             <a:r>
@@ -5217,7 +5194,7 @@
           <a:bodyPr wrap="square" lIns="0" tIns="0" rIns="0" bIns="0" rtlCol="0" anchor="ctr"/>
           <a:lstStyle/>
           <a:p>
-            <a:pPr indent="0" marL="0">
+            <a:pPr marL="0" indent="0">
               <a:buNone/>
             </a:pPr>
             <a:r>
@@ -5261,7 +5238,7 @@
             <a:prstDash val="solid"/>
           </a:ln>
           <a:effectLst>
-            <a:outerShdw sx="100000" sy="100000" kx="0" ky="0" algn="bl" rotWithShape="0" blurRad="76200" dist="38100" dir="2700000">
+            <a:outerShdw blurRad="76200" dist="38100" dir="2700000" algn="bl" rotWithShape="0">
               <a:srgbClr val="000000">
                 <a:alpha val="10000"/>
               </a:srgbClr>
@@ -5290,7 +5267,7 @@
           <a:bodyPr wrap="square" lIns="0" tIns="0" rIns="0" bIns="0" rtlCol="0" anchor="ctr"/>
           <a:lstStyle/>
           <a:p>
-            <a:pPr indent="0" marL="0">
+            <a:pPr marL="0" indent="0">
               <a:buNone/>
             </a:pPr>
             <a:r>
@@ -5329,7 +5306,7 @@
           <a:bodyPr wrap="square" lIns="0" tIns="0" rIns="0" bIns="0" rtlCol="0" anchor="ctr"/>
           <a:lstStyle/>
           <a:p>
-            <a:pPr indent="0" marL="0">
+            <a:pPr marL="0" indent="0">
               <a:buNone/>
             </a:pPr>
             <a:r>
@@ -5368,7 +5345,7 @@
           <a:bodyPr wrap="square" lIns="0" tIns="0" rIns="0" bIns="0" rtlCol="0" anchor="ctr"/>
           <a:lstStyle/>
           <a:p>
-            <a:pPr indent="0" marL="0">
+            <a:pPr marL="0" indent="0">
               <a:buNone/>
             </a:pPr>
             <a:r>
@@ -5412,7 +5389,7 @@
             <a:prstDash val="solid"/>
           </a:ln>
           <a:effectLst>
-            <a:outerShdw sx="100000" sy="100000" kx="0" ky="0" algn="bl" rotWithShape="0" blurRad="76200" dist="38100" dir="2700000">
+            <a:outerShdw blurRad="76200" dist="38100" dir="2700000" algn="bl" rotWithShape="0">
               <a:srgbClr val="000000">
                 <a:alpha val="10000"/>
               </a:srgbClr>
@@ -5441,7 +5418,7 @@
           <a:bodyPr wrap="square" lIns="0" tIns="0" rIns="0" bIns="0" rtlCol="0" anchor="ctr"/>
           <a:lstStyle/>
           <a:p>
-            <a:pPr indent="0" marL="0">
+            <a:pPr marL="0" indent="0">
               <a:buNone/>
             </a:pPr>
             <a:r>
@@ -5505,7 +5482,7 @@
           <a:bodyPr wrap="square" lIns="0" tIns="0" rIns="0" bIns="0" rtlCol="0" anchor="ctr"/>
           <a:lstStyle/>
           <a:p>
-            <a:pPr algn="ctr" indent="0" marL="0">
+            <a:pPr marL="0" indent="0" algn="ctr">
               <a:buNone/>
             </a:pPr>
             <a:r>
@@ -5539,6 +5516,7 @@
         <a:solidFill>
           <a:srgbClr val="FFFFFF"/>
         </a:solidFill>
+        <a:effectLst/>
       </p:bgPr>
     </p:bg>
     <p:spTree>
@@ -5601,7 +5579,7 @@
           <a:bodyPr wrap="square" lIns="0" tIns="0" rIns="0" bIns="0" rtlCol="0" anchor="ctr"/>
           <a:lstStyle/>
           <a:p>
-            <a:pPr indent="0" marL="0">
+            <a:pPr marL="0" indent="0">
               <a:buNone/>
             </a:pPr>
             <a:r>
@@ -5667,7 +5645,7 @@
           <a:bodyPr wrap="square" lIns="0" tIns="0" rIns="0" bIns="0" rtlCol="0" anchor="ctr"/>
           <a:lstStyle/>
           <a:p>
-            <a:pPr algn="ctr" indent="0" marL="0">
+            <a:pPr marL="0" indent="0" algn="ctr">
               <a:buNone/>
             </a:pPr>
             <a:r>
@@ -5706,7 +5684,7 @@
           <a:bodyPr wrap="square" lIns="0" tIns="0" rIns="0" bIns="0" rtlCol="0" anchor="ctr"/>
           <a:lstStyle/>
           <a:p>
-            <a:pPr indent="0" marL="0">
+            <a:pPr marL="0" indent="0">
               <a:buNone/>
             </a:pPr>
             <a:r>
@@ -5750,7 +5728,7 @@
             <a:prstDash val="solid"/>
           </a:ln>
           <a:effectLst>
-            <a:outerShdw sx="100000" sy="100000" kx="0" ky="0" algn="bl" rotWithShape="0" blurRad="76200" dist="38100" dir="2700000">
+            <a:outerShdw blurRad="76200" dist="38100" dir="2700000" algn="bl" rotWithShape="0">
               <a:srgbClr val="000000">
                 <a:alpha val="10000"/>
               </a:srgbClr>
@@ -5779,7 +5757,7 @@
           <a:bodyPr wrap="square" lIns="0" tIns="0" rIns="0" bIns="0" rtlCol="0" anchor="ctr"/>
           <a:lstStyle/>
           <a:p>
-            <a:pPr indent="0" marL="0">
+            <a:pPr marL="0" indent="0">
               <a:buNone/>
             </a:pPr>
             <a:r>
@@ -5818,7 +5796,7 @@
           <a:bodyPr wrap="square" lIns="0" tIns="0" rIns="0" bIns="0" rtlCol="0" anchor="ctr"/>
           <a:lstStyle/>
           <a:p>
-            <a:pPr indent="0" marL="0">
+            <a:pPr marL="0" indent="0">
               <a:buNone/>
             </a:pPr>
             <a:r>
@@ -5857,7 +5835,7 @@
           <a:bodyPr wrap="square" lIns="0" tIns="0" rIns="0" bIns="0" rtlCol="0" anchor="ctr"/>
           <a:lstStyle/>
           <a:p>
-            <a:pPr indent="0" marL="0">
+            <a:pPr marL="0" indent="0">
               <a:buNone/>
             </a:pPr>
             <a:r>
@@ -5896,7 +5874,7 @@
           <a:bodyPr wrap="square" lIns="0" tIns="0" rIns="0" bIns="0" rtlCol="0" anchor="ctr"/>
           <a:lstStyle/>
           <a:p>
-            <a:pPr indent="0" marL="0">
+            <a:pPr marL="0" indent="0">
               <a:buNone/>
             </a:pPr>
             <a:r>
@@ -5935,7 +5913,7 @@
           <a:bodyPr wrap="square" lIns="0" tIns="0" rIns="0" bIns="0" rtlCol="0" anchor="ctr"/>
           <a:lstStyle/>
           <a:p>
-            <a:pPr indent="0" marL="0">
+            <a:pPr marL="0" indent="0">
               <a:buNone/>
             </a:pPr>
             <a:r>
@@ -5974,7 +5952,7 @@
           <a:bodyPr wrap="square" lIns="0" tIns="0" rIns="0" bIns="0" rtlCol="0" anchor="ctr"/>
           <a:lstStyle/>
           <a:p>
-            <a:pPr indent="0" marL="0">
+            <a:pPr marL="0" indent="0">
               <a:buNone/>
             </a:pPr>
             <a:r>
@@ -6013,7 +5991,7 @@
           <a:bodyPr wrap="square" lIns="0" tIns="0" rIns="0" bIns="0" rtlCol="0" anchor="ctr"/>
           <a:lstStyle/>
           <a:p>
-            <a:pPr indent="0" marL="0">
+            <a:pPr marL="0" indent="0">
               <a:buNone/>
             </a:pPr>
             <a:r>
@@ -6052,7 +6030,7 @@
           <a:bodyPr wrap="square" lIns="0" tIns="0" rIns="0" bIns="0" rtlCol="0" anchor="ctr"/>
           <a:lstStyle/>
           <a:p>
-            <a:pPr indent="0" marL="0">
+            <a:pPr marL="0" indent="0">
               <a:buNone/>
             </a:pPr>
             <a:r>
@@ -6091,7 +6069,7 @@
           <a:bodyPr wrap="square" lIns="0" tIns="0" rIns="0" bIns="0" rtlCol="0" anchor="ctr"/>
           <a:lstStyle/>
           <a:p>
-            <a:pPr indent="0" marL="0">
+            <a:pPr marL="0" indent="0">
               <a:buNone/>
             </a:pPr>
             <a:r>
@@ -6130,7 +6108,7 @@
           <a:bodyPr wrap="square" lIns="0" tIns="0" rIns="0" bIns="0" rtlCol="0" anchor="ctr"/>
           <a:lstStyle/>
           <a:p>
-            <a:pPr indent="0" marL="0">
+            <a:pPr marL="0" indent="0">
               <a:buNone/>
             </a:pPr>
             <a:r>
@@ -6169,7 +6147,7 @@
           <a:bodyPr wrap="square" lIns="0" tIns="0" rIns="0" bIns="0" rtlCol="0" anchor="ctr"/>
           <a:lstStyle/>
           <a:p>
-            <a:pPr indent="0" marL="0">
+            <a:pPr marL="0" indent="0">
               <a:buNone/>
             </a:pPr>
             <a:r>
@@ -6213,7 +6191,7 @@
             <a:prstDash val="solid"/>
           </a:ln>
           <a:effectLst>
-            <a:outerShdw sx="100000" sy="100000" kx="0" ky="0" algn="bl" rotWithShape="0" blurRad="76200" dist="38100" dir="2700000">
+            <a:outerShdw blurRad="76200" dist="38100" dir="2700000" algn="bl" rotWithShape="0">
               <a:srgbClr val="000000">
                 <a:alpha val="10000"/>
               </a:srgbClr>
@@ -6242,7 +6220,7 @@
           <a:bodyPr wrap="square" lIns="0" tIns="0" rIns="0" bIns="0" rtlCol="0" anchor="ctr"/>
           <a:lstStyle/>
           <a:p>
-            <a:pPr indent="0" marL="0">
+            <a:pPr marL="0" indent="0">
               <a:buNone/>
             </a:pPr>
             <a:r>
@@ -6281,7 +6259,7 @@
           <a:bodyPr wrap="square" lIns="0" tIns="0" rIns="0" bIns="0" rtlCol="0" anchor="ctr"/>
           <a:lstStyle/>
           <a:p>
-            <a:pPr indent="0" marL="0">
+            <a:pPr marL="0" indent="0">
               <a:buNone/>
             </a:pPr>
             <a:r>
@@ -6320,7 +6298,7 @@
           <a:bodyPr wrap="square" lIns="0" tIns="0" rIns="0" bIns="0" rtlCol="0" anchor="ctr"/>
           <a:lstStyle/>
           <a:p>
-            <a:pPr indent="0" marL="0">
+            <a:pPr marL="0" indent="0">
               <a:buNone/>
             </a:pPr>
             <a:r>
@@ -6359,7 +6337,7 @@
           <a:bodyPr wrap="square" lIns="0" tIns="0" rIns="0" bIns="0" rtlCol="0" anchor="ctr"/>
           <a:lstStyle/>
           <a:p>
-            <a:pPr indent="0" marL="0">
+            <a:pPr marL="0" indent="0">
               <a:buNone/>
             </a:pPr>
             <a:r>
@@ -6398,7 +6376,7 @@
           <a:bodyPr wrap="square" lIns="0" tIns="0" rIns="0" bIns="0" rtlCol="0" anchor="ctr"/>
           <a:lstStyle/>
           <a:p>
-            <a:pPr indent="0" marL="0">
+            <a:pPr marL="0" indent="0">
               <a:buNone/>
             </a:pPr>
             <a:r>
@@ -6437,7 +6415,7 @@
           <a:bodyPr wrap="square" lIns="0" tIns="0" rIns="0" bIns="0" rtlCol="0" anchor="ctr"/>
           <a:lstStyle/>
           <a:p>
-            <a:pPr indent="0" marL="0">
+            <a:pPr marL="0" indent="0">
               <a:buNone/>
             </a:pPr>
             <a:r>
@@ -6476,7 +6454,7 @@
           <a:bodyPr wrap="square" lIns="0" tIns="0" rIns="0" bIns="0" rtlCol="0" anchor="ctr"/>
           <a:lstStyle/>
           <a:p>
-            <a:pPr indent="0" marL="0">
+            <a:pPr marL="0" indent="0">
               <a:buNone/>
             </a:pPr>
             <a:r>
@@ -6515,7 +6493,7 @@
           <a:bodyPr wrap="square" lIns="0" tIns="0" rIns="0" bIns="0" rtlCol="0" anchor="ctr"/>
           <a:lstStyle/>
           <a:p>
-            <a:pPr indent="0" marL="0">
+            <a:pPr marL="0" indent="0">
               <a:buNone/>
             </a:pPr>
             <a:r>
@@ -6559,7 +6537,7 @@
             <a:prstDash val="solid"/>
           </a:ln>
           <a:effectLst>
-            <a:outerShdw sx="100000" sy="100000" kx="0" ky="0" algn="bl" rotWithShape="0" blurRad="76200" dist="38100" dir="2700000">
+            <a:outerShdw blurRad="76200" dist="38100" dir="2700000" algn="bl" rotWithShape="0">
               <a:srgbClr val="000000">
                 <a:alpha val="10000"/>
               </a:srgbClr>
@@ -6588,7 +6566,7 @@
           <a:bodyPr wrap="square" lIns="0" tIns="0" rIns="0" bIns="0" rtlCol="0" anchor="ctr"/>
           <a:lstStyle/>
           <a:p>
-            <a:pPr indent="0" marL="0">
+            <a:pPr marL="0" indent="0">
               <a:buNone/>
             </a:pPr>
             <a:r>
@@ -6627,7 +6605,7 @@
           <a:bodyPr wrap="square" lIns="0" tIns="0" rIns="0" bIns="0" rtlCol="0" anchor="ctr"/>
           <a:lstStyle/>
           <a:p>
-            <a:pPr indent="0" marL="0">
+            <a:pPr marL="0" indent="0">
               <a:buNone/>
             </a:pPr>
             <a:r>
@@ -6666,7 +6644,7 @@
           <a:bodyPr wrap="square" lIns="0" tIns="0" rIns="0" bIns="0" rtlCol="0" anchor="ctr"/>
           <a:lstStyle/>
           <a:p>
-            <a:pPr indent="0" marL="0">
+            <a:pPr marL="0" indent="0">
               <a:buNone/>
             </a:pPr>
             <a:r>
@@ -6705,7 +6683,7 @@
           <a:bodyPr wrap="square" lIns="0" tIns="0" rIns="0" bIns="0" rtlCol="0" anchor="ctr"/>
           <a:lstStyle/>
           <a:p>
-            <a:pPr indent="0" marL="0">
+            <a:pPr marL="0" indent="0">
               <a:buNone/>
             </a:pPr>
             <a:r>
@@ -6744,7 +6722,7 @@
           <a:bodyPr wrap="square" lIns="0" tIns="0" rIns="0" bIns="0" rtlCol="0" anchor="ctr"/>
           <a:lstStyle/>
           <a:p>
-            <a:pPr indent="0" marL="0">
+            <a:pPr marL="0" indent="0">
               <a:buNone/>
             </a:pPr>
             <a:r>
@@ -6783,7 +6761,7 @@
           <a:bodyPr wrap="square" lIns="0" tIns="0" rIns="0" bIns="0" rtlCol="0" anchor="ctr"/>
           <a:lstStyle/>
           <a:p>
-            <a:pPr indent="0" marL="0">
+            <a:pPr marL="0" indent="0">
               <a:buNone/>
             </a:pPr>
             <a:r>
@@ -6822,7 +6800,7 @@
           <a:bodyPr wrap="square" lIns="0" tIns="0" rIns="0" bIns="0" rtlCol="0" anchor="ctr"/>
           <a:lstStyle/>
           <a:p>
-            <a:pPr indent="0" marL="0">
+            <a:pPr marL="0" indent="0">
               <a:buNone/>
             </a:pPr>
             <a:r>
@@ -6886,7 +6864,7 @@
           <a:bodyPr wrap="square" lIns="0" tIns="0" rIns="0" bIns="0" rtlCol="0" anchor="ctr"/>
           <a:lstStyle/>
           <a:p>
-            <a:pPr algn="ctr" indent="0" marL="0">
+            <a:pPr marL="0" indent="0" algn="ctr">
               <a:buNone/>
             </a:pPr>
             <a:r>
@@ -6920,6 +6898,7 @@
         <a:solidFill>
           <a:srgbClr val="0F172A"/>
         </a:solidFill>
+        <a:effectLst/>
       </p:bgPr>
     </p:bg>
     <p:spTree>
@@ -7011,11 +6990,11 @@
           <a:bodyPr wrap="square" lIns="0" tIns="0" rIns="0" bIns="0" rtlCol="0" anchor="ctr"/>
           <a:lstStyle/>
           <a:p>
-            <a:pPr indent="0" marL="0">
-              <a:buNone/>
-            </a:pPr>
-            <a:r>
-              <a:rPr lang="en-US" sz="1200" b="1" spc="400" kern="0" dirty="0">
+            <a:pPr marL="0" indent="0">
+              <a:buNone/>
+            </a:pPr>
+            <a:r>
+              <a:rPr lang="en-US" sz="1200" b="1" kern="0" spc="400" dirty="0">
                 <a:solidFill>
                   <a:srgbClr val="326CE5"/>
                 </a:solidFill>
@@ -7050,7 +7029,7 @@
           <a:bodyPr wrap="square" lIns="0" tIns="0" rIns="0" bIns="0" rtlCol="0" anchor="ctr"/>
           <a:lstStyle/>
           <a:p>
-            <a:pPr indent="0" marL="0">
+            <a:pPr marL="0" indent="0">
               <a:buNone/>
             </a:pPr>
             <a:r>
@@ -7089,7 +7068,7 @@
           <a:bodyPr wrap="square" lIns="0" tIns="0" rIns="0" bIns="0" rtlCol="0" anchor="ctr"/>
           <a:lstStyle/>
           <a:p>
-            <a:pPr indent="0" marL="0">
+            <a:pPr marL="0" indent="0">
               <a:buNone/>
             </a:pPr>
             <a:r>
@@ -7123,6 +7102,7 @@
         <a:solidFill>
           <a:srgbClr val="FFFFFF"/>
         </a:solidFill>
+        <a:effectLst/>
       </p:bgPr>
     </p:bg>
     <p:spTree>
@@ -7185,7 +7165,7 @@
           <a:bodyPr wrap="square" lIns="0" tIns="0" rIns="0" bIns="0" rtlCol="0" anchor="ctr"/>
           <a:lstStyle/>
           <a:p>
-            <a:pPr indent="0" marL="0">
+            <a:pPr marL="0" indent="0">
               <a:buNone/>
             </a:pPr>
             <a:r>
@@ -7251,7 +7231,7 @@
           <a:bodyPr wrap="square" lIns="0" tIns="0" rIns="0" bIns="0" rtlCol="0" anchor="ctr"/>
           <a:lstStyle/>
           <a:p>
-            <a:pPr algn="ctr" indent="0" marL="0">
+            <a:pPr marL="0" indent="0" algn="ctr">
               <a:buNone/>
             </a:pPr>
             <a:r>
@@ -7295,7 +7275,7 @@
             <a:prstDash val="solid"/>
           </a:ln>
           <a:effectLst>
-            <a:outerShdw sx="100000" sy="100000" kx="0" ky="0" algn="bl" rotWithShape="0" blurRad="76200" dist="38100" dir="2700000">
+            <a:outerShdw blurRad="76200" dist="38100" dir="2700000" algn="bl" rotWithShape="0">
               <a:srgbClr val="000000">
                 <a:alpha val="10000"/>
               </a:srgbClr>
@@ -7324,7 +7304,7 @@
           <a:bodyPr wrap="square" lIns="0" tIns="0" rIns="0" bIns="0" rtlCol="0" anchor="ctr"/>
           <a:lstStyle/>
           <a:p>
-            <a:pPr indent="0" marL="0">
+            <a:pPr marL="0" indent="0">
               <a:buNone/>
             </a:pPr>
             <a:r>
@@ -7368,7 +7348,7 @@
             <a:prstDash val="solid"/>
           </a:ln>
           <a:effectLst>
-            <a:outerShdw sx="100000" sy="100000" kx="0" ky="0" algn="bl" rotWithShape="0" blurRad="76200" dist="38100" dir="2700000">
+            <a:outerShdw blurRad="76200" dist="38100" dir="2700000" algn="bl" rotWithShape="0">
               <a:srgbClr val="000000">
                 <a:alpha val="10000"/>
               </a:srgbClr>
@@ -7397,7 +7377,7 @@
           <a:bodyPr wrap="square" lIns="0" tIns="0" rIns="0" bIns="0" rtlCol="0" anchor="ctr"/>
           <a:lstStyle/>
           <a:p>
-            <a:pPr indent="0" marL="0">
+            <a:pPr marL="0" indent="0">
               <a:buNone/>
             </a:pPr>
             <a:r>
@@ -7433,7 +7413,7 @@
           <a:bodyPr wrap="square" lIns="0" tIns="0" rIns="0" bIns="0" rtlCol="0" anchor="ctr"/>
           <a:lstStyle/>
           <a:p>
-            <a:pPr indent="0" marL="0">
+            <a:pPr marL="0" indent="0">
               <a:buNone/>
             </a:pPr>
             <a:r>
@@ -7499,7 +7479,7 @@
           <a:bodyPr wrap="square" lIns="0" tIns="0" rIns="0" bIns="0" rtlCol="0" anchor="ctr"/>
           <a:lstStyle/>
           <a:p>
-            <a:pPr algn="ctr" indent="0" marL="0">
+            <a:pPr marL="0" indent="0" algn="ctr">
               <a:buNone/>
             </a:pPr>
             <a:r>
@@ -7538,7 +7518,7 @@
           <a:bodyPr wrap="square" lIns="0" tIns="0" rIns="0" bIns="0" rtlCol="0" anchor="ctr"/>
           <a:lstStyle/>
           <a:p>
-            <a:pPr indent="0" marL="0">
+            <a:pPr marL="0" indent="0">
               <a:buNone/>
             </a:pPr>
             <a:r>
@@ -7582,7 +7562,7 @@
             <a:prstDash val="solid"/>
           </a:ln>
           <a:effectLst>
-            <a:outerShdw sx="100000" sy="100000" kx="0" ky="0" algn="bl" rotWithShape="0" blurRad="76200" dist="38100" dir="2700000">
+            <a:outerShdw blurRad="76200" dist="38100" dir="2700000" algn="bl" rotWithShape="0">
               <a:srgbClr val="000000">
                 <a:alpha val="10000"/>
               </a:srgbClr>
@@ -7611,7 +7591,7 @@
           <a:bodyPr wrap="square" lIns="0" tIns="0" rIns="0" bIns="0" rtlCol="0" anchor="ctr"/>
           <a:lstStyle/>
           <a:p>
-            <a:pPr indent="0" marL="0">
+            <a:pPr marL="0" indent="0">
               <a:buNone/>
             </a:pPr>
             <a:r>
@@ -7647,7 +7627,7 @@
           <a:bodyPr wrap="square" lIns="0" tIns="0" rIns="0" bIns="0" rtlCol="0" anchor="ctr"/>
           <a:lstStyle/>
           <a:p>
-            <a:pPr indent="0" marL="0">
+            <a:pPr marL="0" indent="0">
               <a:buNone/>
             </a:pPr>
             <a:r>
@@ -7713,7 +7693,7 @@
           <a:bodyPr wrap="square" lIns="0" tIns="0" rIns="0" bIns="0" rtlCol="0" anchor="ctr"/>
           <a:lstStyle/>
           <a:p>
-            <a:pPr algn="ctr" indent="0" marL="0">
+            <a:pPr marL="0" indent="0" algn="ctr">
               <a:buNone/>
             </a:pPr>
             <a:r>
@@ -7752,7 +7732,7 @@
           <a:bodyPr wrap="square" lIns="0" tIns="0" rIns="0" bIns="0" rtlCol="0" anchor="ctr"/>
           <a:lstStyle/>
           <a:p>
-            <a:pPr indent="0" marL="0">
+            <a:pPr marL="0" indent="0">
               <a:buNone/>
             </a:pPr>
             <a:r>
@@ -7796,7 +7776,7 @@
             <a:prstDash val="solid"/>
           </a:ln>
           <a:effectLst>
-            <a:outerShdw sx="100000" sy="100000" kx="0" ky="0" algn="bl" rotWithShape="0" blurRad="76200" dist="38100" dir="2700000">
+            <a:outerShdw blurRad="76200" dist="38100" dir="2700000" algn="bl" rotWithShape="0">
               <a:srgbClr val="000000">
                 <a:alpha val="10000"/>
               </a:srgbClr>
@@ -7825,7 +7805,7 @@
           <a:bodyPr wrap="square" lIns="0" tIns="0" rIns="0" bIns="0" rtlCol="0" anchor="ctr"/>
           <a:lstStyle/>
           <a:p>
-            <a:pPr indent="0" marL="0">
+            <a:pPr marL="0" indent="0">
               <a:buNone/>
             </a:pPr>
             <a:r>
@@ -7861,7 +7841,7 @@
           <a:bodyPr wrap="square" lIns="0" tIns="0" rIns="0" bIns="0" rtlCol="0" anchor="ctr"/>
           <a:lstStyle/>
           <a:p>
-            <a:pPr indent="0" marL="0">
+            <a:pPr marL="0" indent="0">
               <a:buNone/>
             </a:pPr>
             <a:r>
@@ -7927,7 +7907,7 @@
           <a:bodyPr wrap="square" lIns="0" tIns="0" rIns="0" bIns="0" rtlCol="0" anchor="ctr"/>
           <a:lstStyle/>
           <a:p>
-            <a:pPr algn="ctr" indent="0" marL="0">
+            <a:pPr marL="0" indent="0" algn="ctr">
               <a:buNone/>
             </a:pPr>
             <a:r>
@@ -7966,7 +7946,7 @@
           <a:bodyPr wrap="square" lIns="0" tIns="0" rIns="0" bIns="0" rtlCol="0" anchor="ctr"/>
           <a:lstStyle/>
           <a:p>
-            <a:pPr indent="0" marL="0">
+            <a:pPr marL="0" indent="0">
               <a:buNone/>
             </a:pPr>
             <a:r>
@@ -8005,7 +7985,7 @@
           <a:bodyPr wrap="square" lIns="0" tIns="0" rIns="0" bIns="0" rtlCol="0" anchor="ctr"/>
           <a:lstStyle/>
           <a:p>
-            <a:pPr indent="0" marL="0">
+            <a:pPr marL="0" indent="0">
               <a:buNone/>
             </a:pPr>
             <a:r>
@@ -8069,7 +8049,7 @@
           <a:bodyPr wrap="square" lIns="0" tIns="0" rIns="0" bIns="0" rtlCol="0" anchor="ctr"/>
           <a:lstStyle/>
           <a:p>
-            <a:pPr algn="ctr" indent="0" marL="0">
+            <a:pPr marL="0" indent="0" algn="ctr">
               <a:buNone/>
             </a:pPr>
             <a:r>
@@ -8103,6 +8083,7 @@
         <a:solidFill>
           <a:srgbClr val="0F172A"/>
         </a:solidFill>
+        <a:effectLst/>
       </p:bgPr>
     </p:bg>
     <p:spTree>
@@ -8194,11 +8175,11 @@
           <a:bodyPr wrap="square" lIns="0" tIns="0" rIns="0" bIns="0" rtlCol="0" anchor="ctr"/>
           <a:lstStyle/>
           <a:p>
-            <a:pPr indent="0" marL="0">
-              <a:buNone/>
-            </a:pPr>
-            <a:r>
-              <a:rPr lang="en-US" sz="1200" b="1" spc="400" kern="0" dirty="0">
+            <a:pPr marL="0" indent="0">
+              <a:buNone/>
+            </a:pPr>
+            <a:r>
+              <a:rPr lang="en-US" sz="1200" b="1" kern="0" spc="400" dirty="0">
                 <a:solidFill>
                   <a:srgbClr val="326CE5"/>
                 </a:solidFill>
@@ -8233,7 +8214,7 @@
           <a:bodyPr wrap="square" lIns="0" tIns="0" rIns="0" bIns="0" rtlCol="0" anchor="ctr"/>
           <a:lstStyle/>
           <a:p>
-            <a:pPr indent="0" marL="0">
+            <a:pPr marL="0" indent="0">
               <a:buNone/>
             </a:pPr>
             <a:r>
@@ -8272,7 +8253,7 @@
           <a:bodyPr wrap="square" lIns="0" tIns="0" rIns="0" bIns="0" rtlCol="0" anchor="ctr"/>
           <a:lstStyle/>
           <a:p>
-            <a:pPr indent="0" marL="0">
+            <a:pPr marL="0" indent="0">
               <a:buNone/>
             </a:pPr>
             <a:r>
@@ -8306,6 +8287,7 @@
         <a:solidFill>
           <a:srgbClr val="FFFFFF"/>
         </a:solidFill>
+        <a:effectLst/>
       </p:bgPr>
     </p:bg>
     <p:spTree>
@@ -8368,7 +8350,7 @@
           <a:bodyPr wrap="square" lIns="0" tIns="0" rIns="0" bIns="0" rtlCol="0" anchor="ctr"/>
           <a:lstStyle/>
           <a:p>
-            <a:pPr indent="0" marL="0">
+            <a:pPr marL="0" indent="0">
               <a:buNone/>
             </a:pPr>
             <a:r>
@@ -8434,7 +8416,7 @@
           <a:bodyPr wrap="square" lIns="0" tIns="0" rIns="0" bIns="0" rtlCol="0" anchor="ctr"/>
           <a:lstStyle/>
           <a:p>
-            <a:pPr algn="ctr" indent="0" marL="0">
+            <a:pPr marL="0" indent="0" algn="ctr">
               <a:buNone/>
             </a:pPr>
             <a:r>
@@ -8478,7 +8460,7 @@
             <a:prstDash val="solid"/>
           </a:ln>
           <a:effectLst>
-            <a:outerShdw sx="100000" sy="100000" kx="0" ky="0" algn="bl" rotWithShape="0" blurRad="76200" dist="38100" dir="2700000">
+            <a:outerShdw blurRad="76200" dist="38100" dir="2700000" algn="bl" rotWithShape="0">
               <a:srgbClr val="000000">
                 <a:alpha val="10000"/>
               </a:srgbClr>
@@ -8507,7 +8489,7 @@
           <a:bodyPr wrap="square" lIns="0" tIns="0" rIns="0" bIns="0" rtlCol="0" anchor="ctr"/>
           <a:lstStyle/>
           <a:p>
-            <a:pPr indent="0" marL="0">
+            <a:pPr marL="0" indent="0">
               <a:buNone/>
             </a:pPr>
             <a:r>
@@ -8551,7 +8533,7 @@
             <a:prstDash val="solid"/>
           </a:ln>
           <a:effectLst>
-            <a:outerShdw sx="100000" sy="100000" kx="0" ky="0" algn="bl" rotWithShape="0" blurRad="76200" dist="38100" dir="2700000">
+            <a:outerShdw blurRad="76200" dist="38100" dir="2700000" algn="bl" rotWithShape="0">
               <a:srgbClr val="000000">
                 <a:alpha val="10000"/>
               </a:srgbClr>
@@ -8605,7 +8587,7 @@
           <a:bodyPr wrap="square" lIns="0" tIns="0" rIns="0" bIns="0" rtlCol="0" anchor="ctr"/>
           <a:lstStyle/>
           <a:p>
-            <a:pPr algn="ctr" indent="0" marL="0">
+            <a:pPr marL="0" indent="0" algn="ctr">
               <a:buNone/>
             </a:pPr>
             <a:r>
@@ -8644,7 +8626,7 @@
           <a:bodyPr wrap="square" lIns="0" tIns="0" rIns="0" bIns="0" rtlCol="0" anchor="ctr"/>
           <a:lstStyle/>
           <a:p>
-            <a:pPr indent="0" marL="0">
+            <a:pPr marL="0" indent="0">
               <a:buNone/>
             </a:pPr>
             <a:r>
@@ -8683,7 +8665,7 @@
           <a:bodyPr wrap="square" lIns="0" tIns="0" rIns="0" bIns="0" rtlCol="0" anchor="ctr"/>
           <a:lstStyle/>
           <a:p>
-            <a:pPr indent="0" marL="0">
+            <a:pPr marL="0" indent="0">
               <a:buNone/>
             </a:pPr>
             <a:r>
@@ -8727,7 +8709,7 @@
             <a:prstDash val="solid"/>
           </a:ln>
           <a:effectLst>
-            <a:outerShdw sx="100000" sy="100000" kx="0" ky="0" algn="bl" rotWithShape="0" blurRad="76200" dist="38100" dir="2700000">
+            <a:outerShdw blurRad="76200" dist="38100" dir="2700000" algn="bl" rotWithShape="0">
               <a:srgbClr val="000000">
                 <a:alpha val="10000"/>
               </a:srgbClr>
@@ -8781,7 +8763,7 @@
           <a:bodyPr wrap="square" lIns="0" tIns="0" rIns="0" bIns="0" rtlCol="0" anchor="ctr"/>
           <a:lstStyle/>
           <a:p>
-            <a:pPr algn="ctr" indent="0" marL="0">
+            <a:pPr marL="0" indent="0" algn="ctr">
               <a:buNone/>
             </a:pPr>
             <a:r>
@@ -8820,7 +8802,7 @@
           <a:bodyPr wrap="square" lIns="0" tIns="0" rIns="0" bIns="0" rtlCol="0" anchor="ctr"/>
           <a:lstStyle/>
           <a:p>
-            <a:pPr indent="0" marL="0">
+            <a:pPr marL="0" indent="0">
               <a:buNone/>
             </a:pPr>
             <a:r>
@@ -8859,7 +8841,7 @@
           <a:bodyPr wrap="square" lIns="0" tIns="0" rIns="0" bIns="0" rtlCol="0" anchor="ctr"/>
           <a:lstStyle/>
           <a:p>
-            <a:pPr indent="0" marL="0">
+            <a:pPr marL="0" indent="0">
               <a:buNone/>
             </a:pPr>
             <a:r>
@@ -8903,7 +8885,7 @@
             <a:prstDash val="solid"/>
           </a:ln>
           <a:effectLst>
-            <a:outerShdw sx="100000" sy="100000" kx="0" ky="0" algn="bl" rotWithShape="0" blurRad="76200" dist="38100" dir="2700000">
+            <a:outerShdw blurRad="76200" dist="38100" dir="2700000" algn="bl" rotWithShape="0">
               <a:srgbClr val="000000">
                 <a:alpha val="10000"/>
               </a:srgbClr>
@@ -8957,7 +8939,7 @@
           <a:bodyPr wrap="square" lIns="0" tIns="0" rIns="0" bIns="0" rtlCol="0" anchor="ctr"/>
           <a:lstStyle/>
           <a:p>
-            <a:pPr algn="ctr" indent="0" marL="0">
+            <a:pPr marL="0" indent="0" algn="ctr">
               <a:buNone/>
             </a:pPr>
             <a:r>
@@ -8996,7 +8978,7 @@
           <a:bodyPr wrap="square" lIns="0" tIns="0" rIns="0" bIns="0" rtlCol="0" anchor="ctr"/>
           <a:lstStyle/>
           <a:p>
-            <a:pPr indent="0" marL="0">
+            <a:pPr marL="0" indent="0">
               <a:buNone/>
             </a:pPr>
             <a:r>
@@ -9035,7 +9017,7 @@
           <a:bodyPr wrap="square" lIns="0" tIns="0" rIns="0" bIns="0" rtlCol="0" anchor="ctr"/>
           <a:lstStyle/>
           <a:p>
-            <a:pPr indent="0" marL="0">
+            <a:pPr marL="0" indent="0">
               <a:buNone/>
             </a:pPr>
             <a:r>
@@ -9079,7 +9061,7 @@
             <a:prstDash val="solid"/>
           </a:ln>
           <a:effectLst>
-            <a:outerShdw sx="100000" sy="100000" kx="0" ky="0" algn="bl" rotWithShape="0" blurRad="76200" dist="38100" dir="2700000">
+            <a:outerShdw blurRad="76200" dist="38100" dir="2700000" algn="bl" rotWithShape="0">
               <a:srgbClr val="000000">
                 <a:alpha val="10000"/>
               </a:srgbClr>
@@ -9133,7 +9115,7 @@
           <a:bodyPr wrap="square" lIns="0" tIns="0" rIns="0" bIns="0" rtlCol="0" anchor="ctr"/>
           <a:lstStyle/>
           <a:p>
-            <a:pPr algn="ctr" indent="0" marL="0">
+            <a:pPr marL="0" indent="0" algn="ctr">
               <a:buNone/>
             </a:pPr>
             <a:r>
@@ -9172,7 +9154,7 @@
           <a:bodyPr wrap="square" lIns="0" tIns="0" rIns="0" bIns="0" rtlCol="0" anchor="ctr"/>
           <a:lstStyle/>
           <a:p>
-            <a:pPr indent="0" marL="0">
+            <a:pPr marL="0" indent="0">
               <a:buNone/>
             </a:pPr>
             <a:r>
@@ -9211,7 +9193,7 @@
           <a:bodyPr wrap="square" lIns="0" tIns="0" rIns="0" bIns="0" rtlCol="0" anchor="ctr"/>
           <a:lstStyle/>
           <a:p>
-            <a:pPr indent="0" marL="0">
+            <a:pPr marL="0" indent="0">
               <a:buNone/>
             </a:pPr>
             <a:r>
@@ -9255,7 +9237,7 @@
             <a:prstDash val="solid"/>
           </a:ln>
           <a:effectLst>
-            <a:outerShdw sx="100000" sy="100000" kx="0" ky="0" algn="bl" rotWithShape="0" blurRad="76200" dist="38100" dir="2700000">
+            <a:outerShdw blurRad="76200" dist="38100" dir="2700000" algn="bl" rotWithShape="0">
               <a:srgbClr val="000000">
                 <a:alpha val="10000"/>
               </a:srgbClr>
@@ -9309,7 +9291,7 @@
           <a:bodyPr wrap="square" lIns="0" tIns="0" rIns="0" bIns="0" rtlCol="0" anchor="ctr"/>
           <a:lstStyle/>
           <a:p>
-            <a:pPr algn="ctr" indent="0" marL="0">
+            <a:pPr marL="0" indent="0" algn="ctr">
               <a:buNone/>
             </a:pPr>
             <a:r>
@@ -9348,7 +9330,7 @@
           <a:bodyPr wrap="square" lIns="0" tIns="0" rIns="0" bIns="0" rtlCol="0" anchor="ctr"/>
           <a:lstStyle/>
           <a:p>
-            <a:pPr indent="0" marL="0">
+            <a:pPr marL="0" indent="0">
               <a:buNone/>
             </a:pPr>
             <a:r>
@@ -9387,7 +9369,7 @@
           <a:bodyPr wrap="square" lIns="0" tIns="0" rIns="0" bIns="0" rtlCol="0" anchor="ctr"/>
           <a:lstStyle/>
           <a:p>
-            <a:pPr indent="0" marL="0">
+            <a:pPr marL="0" indent="0">
               <a:buNone/>
             </a:pPr>
             <a:r>
@@ -9451,7 +9433,7 @@
           <a:bodyPr wrap="square" lIns="0" tIns="0" rIns="0" bIns="0" rtlCol="0" anchor="ctr"/>
           <a:lstStyle/>
           <a:p>
-            <a:pPr algn="ctr" indent="0" marL="0">
+            <a:pPr marL="0" indent="0" algn="ctr">
               <a:buNone/>
             </a:pPr>
             <a:r>
@@ -9485,6 +9467,7 @@
         <a:solidFill>
           <a:srgbClr val="FFFFFF"/>
         </a:solidFill>
+        <a:effectLst/>
       </p:bgPr>
     </p:bg>
     <p:spTree>
@@ -9547,7 +9530,7 @@
           <a:bodyPr wrap="square" lIns="0" tIns="0" rIns="0" bIns="0" rtlCol="0" anchor="ctr"/>
           <a:lstStyle/>
           <a:p>
-            <a:pPr indent="0" marL="0">
+            <a:pPr marL="0" indent="0">
               <a:buNone/>
             </a:pPr>
             <a:r>
@@ -9613,7 +9596,7 @@
           <a:bodyPr wrap="square" lIns="0" tIns="0" rIns="0" bIns="0" rtlCol="0" anchor="ctr"/>
           <a:lstStyle/>
           <a:p>
-            <a:pPr algn="ctr" indent="0" marL="0">
+            <a:pPr marL="0" indent="0" algn="ctr">
               <a:buNone/>
             </a:pPr>
             <a:r>
@@ -9679,7 +9662,7 @@
           <a:bodyPr wrap="square" lIns="0" tIns="0" rIns="0" bIns="0" rtlCol="0" anchor="ctr"/>
           <a:lstStyle/>
           <a:p>
-            <a:pPr algn="ctr" indent="0" marL="0">
+            <a:pPr marL="0" indent="0" algn="ctr">
               <a:buNone/>
             </a:pPr>
             <a:r>
@@ -9743,7 +9726,7 @@
           <a:bodyPr wrap="square" lIns="0" tIns="0" rIns="0" bIns="0" rtlCol="0" anchor="ctr"/>
           <a:lstStyle/>
           <a:p>
-            <a:pPr indent="0" marL="0">
+            <a:pPr marL="0" indent="0">
               <a:buNone/>
             </a:pPr>
             <a:r>
@@ -9782,7 +9765,7 @@
           <a:bodyPr wrap="square" lIns="0" tIns="0" rIns="0" bIns="0" rtlCol="0" anchor="ctr"/>
           <a:lstStyle/>
           <a:p>
-            <a:pPr indent="0" marL="0">
+            <a:pPr marL="0" indent="0">
               <a:buNone/>
             </a:pPr>
             <a:r>
@@ -9821,7 +9804,7 @@
           <a:bodyPr wrap="square" lIns="0" tIns="0" rIns="0" bIns="0" rtlCol="0" anchor="ctr"/>
           <a:lstStyle/>
           <a:p>
-            <a:pPr indent="0" marL="0">
+            <a:pPr marL="0" indent="0">
               <a:buNone/>
             </a:pPr>
             <a:r>
@@ -9885,7 +9868,7 @@
           <a:bodyPr wrap="square" lIns="0" tIns="0" rIns="0" bIns="0" rtlCol="0" anchor="ctr"/>
           <a:lstStyle/>
           <a:p>
-            <a:pPr indent="0" marL="0">
+            <a:pPr marL="0" indent="0">
               <a:buNone/>
             </a:pPr>
             <a:r>
@@ -9924,7 +9907,7 @@
           <a:bodyPr wrap="square" lIns="0" tIns="0" rIns="0" bIns="0" rtlCol="0" anchor="ctr"/>
           <a:lstStyle/>
           <a:p>
-            <a:pPr indent="0" marL="0">
+            <a:pPr marL="0" indent="0">
               <a:buNone/>
             </a:pPr>
             <a:r>
@@ -9963,7 +9946,7 @@
           <a:bodyPr wrap="square" lIns="0" tIns="0" rIns="0" bIns="0" rtlCol="0" anchor="ctr"/>
           <a:lstStyle/>
           <a:p>
-            <a:pPr indent="0" marL="0">
+            <a:pPr marL="0" indent="0">
               <a:buNone/>
             </a:pPr>
             <a:r>
@@ -10027,7 +10010,7 @@
           <a:bodyPr wrap="square" lIns="0" tIns="0" rIns="0" bIns="0" rtlCol="0" anchor="ctr"/>
           <a:lstStyle/>
           <a:p>
-            <a:pPr indent="0" marL="0">
+            <a:pPr marL="0" indent="0">
               <a:buNone/>
             </a:pPr>
             <a:r>
@@ -10066,7 +10049,7 @@
           <a:bodyPr wrap="square" lIns="0" tIns="0" rIns="0" bIns="0" rtlCol="0" anchor="ctr"/>
           <a:lstStyle/>
           <a:p>
-            <a:pPr indent="0" marL="0">
+            <a:pPr marL="0" indent="0">
               <a:buNone/>
             </a:pPr>
             <a:r>
@@ -10105,7 +10088,7 @@
           <a:bodyPr wrap="square" lIns="0" tIns="0" rIns="0" bIns="0" rtlCol="0" anchor="ctr"/>
           <a:lstStyle/>
           <a:p>
-            <a:pPr indent="0" marL="0">
+            <a:pPr marL="0" indent="0">
               <a:buNone/>
             </a:pPr>
             <a:r>
@@ -10169,7 +10152,7 @@
           <a:bodyPr wrap="square" lIns="0" tIns="0" rIns="0" bIns="0" rtlCol="0" anchor="ctr"/>
           <a:lstStyle/>
           <a:p>
-            <a:pPr indent="0" marL="0">
+            <a:pPr marL="0" indent="0">
               <a:buNone/>
             </a:pPr>
             <a:r>
@@ -10208,7 +10191,7 @@
           <a:bodyPr wrap="square" lIns="0" tIns="0" rIns="0" bIns="0" rtlCol="0" anchor="ctr"/>
           <a:lstStyle/>
           <a:p>
-            <a:pPr indent="0" marL="0">
+            <a:pPr marL="0" indent="0">
               <a:buNone/>
             </a:pPr>
             <a:r>
@@ -10247,7 +10230,7 @@
           <a:bodyPr wrap="square" lIns="0" tIns="0" rIns="0" bIns="0" rtlCol="0" anchor="ctr"/>
           <a:lstStyle/>
           <a:p>
-            <a:pPr indent="0" marL="0">
+            <a:pPr marL="0" indent="0">
               <a:buNone/>
             </a:pPr>
             <a:r>
@@ -10311,7 +10294,7 @@
           <a:bodyPr wrap="square" lIns="0" tIns="0" rIns="0" bIns="0" rtlCol="0" anchor="ctr"/>
           <a:lstStyle/>
           <a:p>
-            <a:pPr indent="0" marL="0">
+            <a:pPr marL="0" indent="0">
               <a:buNone/>
             </a:pPr>
             <a:r>
@@ -10350,7 +10333,7 @@
           <a:bodyPr wrap="square" lIns="0" tIns="0" rIns="0" bIns="0" rtlCol="0" anchor="ctr"/>
           <a:lstStyle/>
           <a:p>
-            <a:pPr indent="0" marL="0">
+            <a:pPr marL="0" indent="0">
               <a:buNone/>
             </a:pPr>
             <a:r>
@@ -10389,7 +10372,7 @@
           <a:bodyPr wrap="square" lIns="0" tIns="0" rIns="0" bIns="0" rtlCol="0" anchor="ctr"/>
           <a:lstStyle/>
           <a:p>
-            <a:pPr indent="0" marL="0">
+            <a:pPr marL="0" indent="0">
               <a:buNone/>
             </a:pPr>
             <a:r>
@@ -10453,7 +10436,7 @@
           <a:bodyPr wrap="square" lIns="0" tIns="0" rIns="0" bIns="0" rtlCol="0" anchor="ctr"/>
           <a:lstStyle/>
           <a:p>
-            <a:pPr indent="0" marL="0">
+            <a:pPr marL="0" indent="0">
               <a:buNone/>
             </a:pPr>
             <a:r>
@@ -10492,7 +10475,7 @@
           <a:bodyPr wrap="square" lIns="0" tIns="0" rIns="0" bIns="0" rtlCol="0" anchor="ctr"/>
           <a:lstStyle/>
           <a:p>
-            <a:pPr indent="0" marL="0">
+            <a:pPr marL="0" indent="0">
               <a:buNone/>
             </a:pPr>
             <a:r>
@@ -10531,7 +10514,7 @@
           <a:bodyPr wrap="square" lIns="0" tIns="0" rIns="0" bIns="0" rtlCol="0" anchor="ctr"/>
           <a:lstStyle/>
           <a:p>
-            <a:pPr indent="0" marL="0">
+            <a:pPr marL="0" indent="0">
               <a:buNone/>
             </a:pPr>
             <a:r>
@@ -10595,7 +10578,7 @@
           <a:bodyPr wrap="square" lIns="0" tIns="0" rIns="0" bIns="0" rtlCol="0" anchor="ctr"/>
           <a:lstStyle/>
           <a:p>
-            <a:pPr indent="0" marL="0">
+            <a:pPr marL="0" indent="0">
               <a:buNone/>
             </a:pPr>
             <a:r>
@@ -10634,7 +10617,7 @@
           <a:bodyPr wrap="square" lIns="0" tIns="0" rIns="0" bIns="0" rtlCol="0" anchor="ctr"/>
           <a:lstStyle/>
           <a:p>
-            <a:pPr indent="0" marL="0">
+            <a:pPr marL="0" indent="0">
               <a:buNone/>
             </a:pPr>
             <a:r>
@@ -10673,7 +10656,7 @@
           <a:bodyPr wrap="square" lIns="0" tIns="0" rIns="0" bIns="0" rtlCol="0" anchor="ctr"/>
           <a:lstStyle/>
           <a:p>
-            <a:pPr indent="0" marL="0">
+            <a:pPr marL="0" indent="0">
               <a:buNone/>
             </a:pPr>
             <a:r>
@@ -10737,7 +10720,7 @@
           <a:bodyPr wrap="square" lIns="0" tIns="0" rIns="0" bIns="0" rtlCol="0" anchor="ctr"/>
           <a:lstStyle/>
           <a:p>
-            <a:pPr indent="0" marL="0">
+            <a:pPr marL="0" indent="0">
               <a:buNone/>
             </a:pPr>
             <a:r>
@@ -10776,7 +10759,7 @@
           <a:bodyPr wrap="square" lIns="0" tIns="0" rIns="0" bIns="0" rtlCol="0" anchor="ctr"/>
           <a:lstStyle/>
           <a:p>
-            <a:pPr indent="0" marL="0">
+            <a:pPr marL="0" indent="0">
               <a:buNone/>
             </a:pPr>
             <a:r>
@@ -10815,7 +10798,7 @@
           <a:bodyPr wrap="square" lIns="0" tIns="0" rIns="0" bIns="0" rtlCol="0" anchor="ctr"/>
           <a:lstStyle/>
           <a:p>
-            <a:pPr indent="0" marL="0">
+            <a:pPr marL="0" indent="0">
               <a:buNone/>
             </a:pPr>
             <a:r>
@@ -10879,7 +10862,7 @@
           <a:bodyPr wrap="square" lIns="0" tIns="0" rIns="0" bIns="0" rtlCol="0" anchor="ctr"/>
           <a:lstStyle/>
           <a:p>
-            <a:pPr algn="ctr" indent="0" marL="0">
+            <a:pPr marL="0" indent="0" algn="ctr">
               <a:buNone/>
             </a:pPr>
             <a:r>
@@ -10913,6 +10896,7 @@
         <a:solidFill>
           <a:srgbClr val="0F172A"/>
         </a:solidFill>
+        <a:effectLst/>
       </p:bgPr>
     </p:bg>
     <p:spTree>
@@ -11004,11 +10988,11 @@
           <a:bodyPr wrap="square" lIns="0" tIns="0" rIns="0" bIns="0" rtlCol="0" anchor="ctr"/>
           <a:lstStyle/>
           <a:p>
-            <a:pPr indent="0" marL="0">
-              <a:buNone/>
-            </a:pPr>
-            <a:r>
-              <a:rPr lang="en-US" sz="1300" b="1" spc="200" kern="0" dirty="0">
+            <a:pPr marL="0" indent="0">
+              <a:buNone/>
+            </a:pPr>
+            <a:r>
+              <a:rPr lang="en-US" sz="1300" b="1" kern="0" spc="200" dirty="0">
                 <a:solidFill>
                   <a:srgbClr val="7C3AED"/>
                 </a:solidFill>
@@ -11043,7 +11027,7 @@
           <a:bodyPr wrap="square" lIns="0" tIns="0" rIns="0" bIns="0" rtlCol="0" anchor="ctr"/>
           <a:lstStyle/>
           <a:p>
-            <a:pPr indent="0" marL="0">
+            <a:pPr marL="0" indent="0">
               <a:buNone/>
             </a:pPr>
             <a:r>
@@ -11132,7 +11116,7 @@
           <a:bodyPr wrap="square" lIns="0" tIns="0" rIns="0" bIns="0" rtlCol="0" anchor="ctr"/>
           <a:lstStyle/>
           <a:p>
-            <a:pPr algn="ctr" indent="0" marL="0">
+            <a:pPr marL="0" indent="0" algn="ctr">
               <a:buNone/>
             </a:pPr>
             <a:r>
@@ -11171,7 +11155,7 @@
           <a:bodyPr wrap="square" lIns="0" tIns="0" rIns="0" bIns="0" rtlCol="0" anchor="ctr"/>
           <a:lstStyle/>
           <a:p>
-            <a:pPr indent="0" marL="0">
+            <a:pPr marL="0" indent="0">
               <a:buNone/>
             </a:pPr>
             <a:r>
@@ -11235,7 +11219,7 @@
           <a:bodyPr wrap="square" lIns="0" tIns="0" rIns="0" bIns="0" rtlCol="0" anchor="ctr"/>
           <a:lstStyle/>
           <a:p>
-            <a:pPr algn="ctr" indent="0" marL="0">
+            <a:pPr marL="0" indent="0" algn="ctr">
               <a:buNone/>
             </a:pPr>
             <a:r>
@@ -11274,7 +11258,7 @@
           <a:bodyPr wrap="square" lIns="0" tIns="0" rIns="0" bIns="0" rtlCol="0" anchor="ctr"/>
           <a:lstStyle/>
           <a:p>
-            <a:pPr indent="0" marL="0">
+            <a:pPr marL="0" indent="0">
               <a:buNone/>
             </a:pPr>
             <a:r>
@@ -11338,7 +11322,7 @@
           <a:bodyPr wrap="square" lIns="0" tIns="0" rIns="0" bIns="0" rtlCol="0" anchor="ctr"/>
           <a:lstStyle/>
           <a:p>
-            <a:pPr algn="ctr" indent="0" marL="0">
+            <a:pPr marL="0" indent="0" algn="ctr">
               <a:buNone/>
             </a:pPr>
             <a:r>
@@ -11377,7 +11361,7 @@
           <a:bodyPr wrap="square" lIns="0" tIns="0" rIns="0" bIns="0" rtlCol="0" anchor="ctr"/>
           <a:lstStyle/>
           <a:p>
-            <a:pPr indent="0" marL="0">
+            <a:pPr marL="0" indent="0">
               <a:buNone/>
             </a:pPr>
             <a:r>
@@ -11441,7 +11425,7 @@
           <a:bodyPr wrap="square" lIns="0" tIns="0" rIns="0" bIns="0" rtlCol="0" anchor="ctr"/>
           <a:lstStyle/>
           <a:p>
-            <a:pPr algn="ctr" indent="0" marL="0">
+            <a:pPr marL="0" indent="0" algn="ctr">
               <a:buNone/>
             </a:pPr>
             <a:r>
@@ -11480,7 +11464,7 @@
           <a:bodyPr wrap="square" lIns="0" tIns="0" rIns="0" bIns="0" rtlCol="0" anchor="ctr"/>
           <a:lstStyle/>
           <a:p>
-            <a:pPr indent="0" marL="0">
+            <a:pPr marL="0" indent="0">
               <a:buNone/>
             </a:pPr>
             <a:r>
@@ -11544,7 +11528,7 @@
           <a:bodyPr wrap="square" lIns="0" tIns="0" rIns="0" bIns="0" rtlCol="0" anchor="ctr"/>
           <a:lstStyle/>
           <a:p>
-            <a:pPr algn="ctr" indent="0" marL="0">
+            <a:pPr marL="0" indent="0" algn="ctr">
               <a:buNone/>
             </a:pPr>
             <a:r>
@@ -11583,7 +11567,7 @@
           <a:bodyPr wrap="square" lIns="0" tIns="0" rIns="0" bIns="0" rtlCol="0" anchor="ctr"/>
           <a:lstStyle/>
           <a:p>
-            <a:pPr indent="0" marL="0">
+            <a:pPr marL="0" indent="0">
               <a:buNone/>
             </a:pPr>
             <a:r>
@@ -11647,7 +11631,7 @@
           <a:bodyPr wrap="square" lIns="0" tIns="0" rIns="0" bIns="0" rtlCol="0" anchor="ctr"/>
           <a:lstStyle/>
           <a:p>
-            <a:pPr algn="ctr" indent="0" marL="0">
+            <a:pPr marL="0" indent="0" algn="ctr">
               <a:buNone/>
             </a:pPr>
             <a:r>
@@ -11686,7 +11670,7 @@
           <a:bodyPr wrap="square" lIns="0" tIns="0" rIns="0" bIns="0" rtlCol="0" anchor="ctr"/>
           <a:lstStyle/>
           <a:p>
-            <a:pPr indent="0" marL="0">
+            <a:pPr marL="0" indent="0">
               <a:buNone/>
             </a:pPr>
             <a:r>
@@ -11756,7 +11740,7 @@
           <a:bodyPr wrap="square" lIns="0" tIns="0" rIns="0" bIns="0" rtlCol="0" anchor="ctr"/>
           <a:lstStyle/>
           <a:p>
-            <a:pPr algn="ctr" indent="0" marL="0">
+            <a:pPr marL="0" indent="0" algn="ctr">
               <a:buNone/>
             </a:pPr>
             <a:r>
@@ -12075,4 +12059,299 @@
     </a:ext>
   </a:extLst>
 </a:theme>
+</file>
+
+<file path=ppt/theme/theme2.xml><?xml version="1.0" encoding="utf-8"?>
+<a:theme xmlns:a="http://schemas.openxmlformats.org/drawingml/2006/main" name="Office Theme">
+  <a:themeElements>
+    <a:clrScheme name="Office">
+      <a:dk1>
+        <a:sysClr val="windowText" lastClr="000000"/>
+      </a:dk1>
+      <a:lt1>
+        <a:sysClr val="window" lastClr="FFFFFF"/>
+      </a:lt1>
+      <a:dk2>
+        <a:srgbClr val="44546A"/>
+      </a:dk2>
+      <a:lt2>
+        <a:srgbClr val="E7E6E6"/>
+      </a:lt2>
+      <a:accent1>
+        <a:srgbClr val="4472C4"/>
+      </a:accent1>
+      <a:accent2>
+        <a:srgbClr val="ED7D31"/>
+      </a:accent2>
+      <a:accent3>
+        <a:srgbClr val="A5A5A5"/>
+      </a:accent3>
+      <a:accent4>
+        <a:srgbClr val="FFC000"/>
+      </a:accent4>
+      <a:accent5>
+        <a:srgbClr val="5B9BD5"/>
+      </a:accent5>
+      <a:accent6>
+        <a:srgbClr val="70AD47"/>
+      </a:accent6>
+      <a:hlink>
+        <a:srgbClr val="0563C1"/>
+      </a:hlink>
+      <a:folHlink>
+        <a:srgbClr val="954F72"/>
+      </a:folHlink>
+    </a:clrScheme>
+    <a:fontScheme name="Office">
+      <a:majorFont>
+        <a:latin typeface="Calibri Light" panose="020F0302020204030204"/>
+        <a:ea typeface=""/>
+        <a:cs typeface=""/>
+        <a:font script="Jpan" typeface="游ゴシック Light"/>
+        <a:font script="Hang" typeface="맑은 고딕"/>
+        <a:font script="Hans" typeface="等线 Light"/>
+        <a:font script="Hant" typeface="新細明體"/>
+        <a:font script="Arab" typeface="Times New Roman"/>
+        <a:font script="Hebr" typeface="Times New Roman"/>
+        <a:font script="Thai" typeface="Angsana New"/>
+        <a:font script="Ethi" typeface="Nyala"/>
+        <a:font script="Beng" typeface="Vrinda"/>
+        <a:font script="Gujr" typeface="Shruti"/>
+        <a:font script="Khmr" typeface="MoolBoran"/>
+        <a:font script="Knda" typeface="Tunga"/>
+        <a:font script="Guru" typeface="Raavi"/>
+        <a:font script="Cans" typeface="Euphemia"/>
+        <a:font script="Cher" typeface="Plantagenet Cherokee"/>
+        <a:font script="Yiii" typeface="Microsoft Yi Baiti"/>
+        <a:font script="Tibt" typeface="Microsoft Himalaya"/>
+        <a:font script="Thaa" typeface="MV Boli"/>
+        <a:font script="Deva" typeface="Mangal"/>
+        <a:font script="Telu" typeface="Gautami"/>
+        <a:font script="Taml" typeface="Latha"/>
+        <a:font script="Syrc" typeface="Estrangelo Edessa"/>
+        <a:font script="Orya" typeface="Kalinga"/>
+        <a:font script="Mlym" typeface="Kartika"/>
+        <a:font script="Laoo" typeface="DokChampa"/>
+        <a:font script="Sinh" typeface="Iskoola Pota"/>
+        <a:font script="Mong" typeface="Mongolian Baiti"/>
+        <a:font script="Viet" typeface="Times New Roman"/>
+        <a:font script="Uigh" typeface="Microsoft Uighur"/>
+        <a:font script="Geor" typeface="Sylfaen"/>
+        <a:font script="Armn" typeface="Arial"/>
+        <a:font script="Bugi" typeface="Leelawadee UI"/>
+        <a:font script="Bopo" typeface="Microsoft JhengHei"/>
+        <a:font script="Java" typeface="Javanese Text"/>
+        <a:font script="Lisu" typeface="Segoe UI"/>
+        <a:font script="Mymr" typeface="Myanmar Text"/>
+        <a:font script="Nkoo" typeface="Ebrima"/>
+        <a:font script="Olck" typeface="Nirmala UI"/>
+        <a:font script="Osma" typeface="Ebrima"/>
+        <a:font script="Phag" typeface="Phagspa"/>
+        <a:font script="Syrn" typeface="Estrangelo Edessa"/>
+        <a:font script="Syrj" typeface="Estrangelo Edessa"/>
+        <a:font script="Syre" typeface="Estrangelo Edessa"/>
+        <a:font script="Sora" typeface="Nirmala UI"/>
+        <a:font script="Tale" typeface="Microsoft Tai Le"/>
+        <a:font script="Talu" typeface="Microsoft New Tai Lue"/>
+        <a:font script="Tfng" typeface="Ebrima"/>
+      </a:majorFont>
+      <a:minorFont>
+        <a:latin typeface="Calibri" panose="020F0502020204030204"/>
+        <a:ea typeface=""/>
+        <a:cs typeface=""/>
+        <a:font script="Jpan" typeface="游ゴシック"/>
+        <a:font script="Hang" typeface="맑은 고딕"/>
+        <a:font script="Hans" typeface="等线"/>
+        <a:font script="Hant" typeface="新細明體"/>
+        <a:font script="Arab" typeface="Arial"/>
+        <a:font script="Hebr" typeface="Arial"/>
+        <a:font script="Thai" typeface="Cordia New"/>
+        <a:font script="Ethi" typeface="Nyala"/>
+        <a:font script="Beng" typeface="Vrinda"/>
+        <a:font script="Gujr" typeface="Shruti"/>
+        <a:font script="Khmr" typeface="DaunPenh"/>
+        <a:font script="Knda" typeface="Tunga"/>
+        <a:font script="Guru" typeface="Raavi"/>
+        <a:font script="Cans" typeface="Euphemia"/>
+        <a:font script="Cher" typeface="Plantagenet Cherokee"/>
+        <a:font script="Yiii" typeface="Microsoft Yi Baiti"/>
+        <a:font script="Tibt" typeface="Microsoft Himalaya"/>
+        <a:font script="Thaa" typeface="MV Boli"/>
+        <a:font script="Deva" typeface="Mangal"/>
+        <a:font script="Telu" typeface="Gautami"/>
+        <a:font script="Taml" typeface="Latha"/>
+        <a:font script="Syrc" typeface="Estrangelo Edessa"/>
+        <a:font script="Orya" typeface="Kalinga"/>
+        <a:font script="Mlym" typeface="Kartika"/>
+        <a:font script="Laoo" typeface="DokChampa"/>
+        <a:font script="Sinh" typeface="Iskoola Pota"/>
+        <a:font script="Mong" typeface="Mongolian Baiti"/>
+        <a:font script="Viet" typeface="Arial"/>
+        <a:font script="Uigh" typeface="Microsoft Uighur"/>
+        <a:font script="Geor" typeface="Sylfaen"/>
+        <a:font script="Armn" typeface="Arial"/>
+        <a:font script="Bugi" typeface="Leelawadee UI"/>
+        <a:font script="Bopo" typeface="Microsoft JhengHei"/>
+        <a:font script="Java" typeface="Javanese Text"/>
+        <a:font script="Lisu" typeface="Segoe UI"/>
+        <a:font script="Mymr" typeface="Myanmar Text"/>
+        <a:font script="Nkoo" typeface="Ebrima"/>
+        <a:font script="Olck" typeface="Nirmala UI"/>
+        <a:font script="Osma" typeface="Ebrima"/>
+        <a:font script="Phag" typeface="Phagspa"/>
+        <a:font script="Syrn" typeface="Estrangelo Edessa"/>
+        <a:font script="Syrj" typeface="Estrangelo Edessa"/>
+        <a:font script="Syre" typeface="Estrangelo Edessa"/>
+        <a:font script="Sora" typeface="Nirmala UI"/>
+        <a:font script="Tale" typeface="Microsoft Tai Le"/>
+        <a:font script="Talu" typeface="Microsoft New Tai Lue"/>
+        <a:font script="Tfng" typeface="Ebrima"/>
+      </a:minorFont>
+    </a:fontScheme>
+    <a:fmtScheme name="Office">
+      <a:fillStyleLst>
+        <a:solidFill>
+          <a:schemeClr val="phClr"/>
+        </a:solidFill>
+        <a:gradFill rotWithShape="1">
+          <a:gsLst>
+            <a:gs pos="0">
+              <a:schemeClr val="phClr">
+                <a:lumMod val="110000"/>
+                <a:satMod val="105000"/>
+                <a:tint val="67000"/>
+              </a:schemeClr>
+            </a:gs>
+            <a:gs pos="50000">
+              <a:schemeClr val="phClr">
+                <a:lumMod val="105000"/>
+                <a:satMod val="103000"/>
+                <a:tint val="73000"/>
+              </a:schemeClr>
+            </a:gs>
+            <a:gs pos="100000">
+              <a:schemeClr val="phClr">
+                <a:lumMod val="105000"/>
+                <a:satMod val="109000"/>
+                <a:tint val="81000"/>
+              </a:schemeClr>
+            </a:gs>
+          </a:gsLst>
+          <a:lin ang="5400000" scaled="0"/>
+        </a:gradFill>
+        <a:gradFill rotWithShape="1">
+          <a:gsLst>
+            <a:gs pos="0">
+              <a:schemeClr val="phClr">
+                <a:satMod val="103000"/>
+                <a:lumMod val="102000"/>
+                <a:tint val="94000"/>
+              </a:schemeClr>
+            </a:gs>
+            <a:gs pos="50000">
+              <a:schemeClr val="phClr">
+                <a:satMod val="110000"/>
+                <a:lumMod val="100000"/>
+                <a:shade val="100000"/>
+              </a:schemeClr>
+            </a:gs>
+            <a:gs pos="100000">
+              <a:schemeClr val="phClr">
+                <a:lumMod val="99000"/>
+                <a:satMod val="120000"/>
+                <a:shade val="78000"/>
+              </a:schemeClr>
+            </a:gs>
+          </a:gsLst>
+          <a:lin ang="5400000" scaled="0"/>
+        </a:gradFill>
+      </a:fillStyleLst>
+      <a:lnStyleLst>
+        <a:ln w="6350" cap="flat" cmpd="sng" algn="ctr">
+          <a:solidFill>
+            <a:schemeClr val="phClr"/>
+          </a:solidFill>
+          <a:prstDash val="solid"/>
+          <a:miter lim="800000"/>
+        </a:ln>
+        <a:ln w="12700" cap="flat" cmpd="sng" algn="ctr">
+          <a:solidFill>
+            <a:schemeClr val="phClr"/>
+          </a:solidFill>
+          <a:prstDash val="solid"/>
+          <a:miter lim="800000"/>
+        </a:ln>
+        <a:ln w="19050" cap="flat" cmpd="sng" algn="ctr">
+          <a:solidFill>
+            <a:schemeClr val="phClr"/>
+          </a:solidFill>
+          <a:prstDash val="solid"/>
+          <a:miter lim="800000"/>
+        </a:ln>
+      </a:lnStyleLst>
+      <a:effectStyleLst>
+        <a:effectStyle>
+          <a:effectLst/>
+        </a:effectStyle>
+        <a:effectStyle>
+          <a:effectLst/>
+        </a:effectStyle>
+        <a:effectStyle>
+          <a:effectLst>
+            <a:outerShdw blurRad="57150" dist="19050" dir="5400000" algn="ctr" rotWithShape="0">
+              <a:srgbClr val="000000">
+                <a:alpha val="63000"/>
+              </a:srgbClr>
+            </a:outerShdw>
+          </a:effectLst>
+        </a:effectStyle>
+      </a:effectStyleLst>
+      <a:bgFillStyleLst>
+        <a:solidFill>
+          <a:schemeClr val="phClr"/>
+        </a:solidFill>
+        <a:solidFill>
+          <a:schemeClr val="phClr">
+            <a:tint val="95000"/>
+            <a:satMod val="170000"/>
+          </a:schemeClr>
+        </a:solidFill>
+        <a:gradFill rotWithShape="1">
+          <a:gsLst>
+            <a:gs pos="0">
+              <a:schemeClr val="phClr">
+                <a:tint val="93000"/>
+                <a:satMod val="150000"/>
+                <a:shade val="98000"/>
+                <a:lumMod val="102000"/>
+              </a:schemeClr>
+            </a:gs>
+            <a:gs pos="50000">
+              <a:schemeClr val="phClr">
+                <a:tint val="98000"/>
+                <a:satMod val="130000"/>
+                <a:shade val="90000"/>
+                <a:lumMod val="103000"/>
+              </a:schemeClr>
+            </a:gs>
+            <a:gs pos="100000">
+              <a:schemeClr val="phClr">
+                <a:shade val="63000"/>
+                <a:satMod val="120000"/>
+              </a:schemeClr>
+            </a:gs>
+          </a:gsLst>
+          <a:lin ang="5400000" scaled="0"/>
+        </a:gradFill>
+      </a:bgFillStyleLst>
+    </a:fmtScheme>
+  </a:themeElements>
+  <a:objectDefaults/>
+  <a:extraClrSchemeLst/>
+  <a:extLst>
+    <a:ext uri="{05A4C25C-085E-4340-85A3-A5531E510DB2}">
+      <thm15:themeFamily xmlns:thm15="http://schemas.microsoft.com/office/thememl/2012/main" name="Office Theme" id="{62F939B6-93AF-4DB8-9C6B-D6C7DFDC589F}" vid="{4A3C46E8-61CC-4603-A589-7422A47A8E4A}"/>
+    </a:ext>
+  </a:extLst>
+</a:theme>
 </file>